--- a/assets/figures-editable/appendix-studies/a-e15.pptx
+++ b/assets/figures-editable/appendix-studies/a-e15.pptx
@@ -7,7 +7,7 @@
   <p:sldIdLst>
     <p:sldId id="256" r:id="rId7"/>
   </p:sldIdLst>
-  <p:sldSz cx="8961120" cy="5660136" type="screen4x3"/>
+  <p:sldSz cx="12191695" cy="6858000" type="screen4x3"/>
   <p:notesSz cx="6858000" cy="9144000"/>
   <p:defaultTextStyle>
     <a:defPPr>
@@ -3098,14 +3098,14 @@
       <p:grpSpPr/>
       <p:sp>
         <p:nvSpPr>
-          <p:cNvPr id="2" name="text 0" descr="sci-ppt:obj-000"/>
+          <p:cNvPr id="2" name="A-E15 text 0" descr="sci-ppt:o000"/>
           <p:cNvSpPr txBox="1"/>
           <p:nvPr/>
         </p:nvSpPr>
         <p:spPr>
           <a:xfrm>
-            <a:off x="256032" y="137160"/>
-            <a:ext cx="7315200" cy="310896"/>
+            <a:off x="274320" y="118872"/>
+            <a:ext cx="11612880" cy="340105"/>
           </a:xfrm>
           <a:prstGeom prst="rect">
             <a:avLst/>
@@ -3114,7 +3114,7 @@
           <a:effectLst/>
         </p:spPr>
         <p:txBody>
-          <a:bodyPr wrap="none" lIns="0" rIns="0" tIns="0" bIns="0" anchor="ctr">
+          <a:bodyPr wrap="none" lIns="18288" rIns="18288" tIns="18288" bIns="18288" anchor="t">
             <a:spAutoFit/>
           </a:bodyPr>
           <a:lstStyle/>
@@ -3125,113 +3125,115 @@
               </a:spcAft>
             </a:pPr>
             <a:r>
-              <a:rPr sz="1439" b="0" i="0">
+              <a:rPr sz="1900" b="1" i="0">
                 <a:solidFill>
                   <a:srgbClr val="8EDBD4"/>
                 </a:solidFill>
                 <a:latin typeface="Arial"/>
               </a:rPr>
-              <a:t>A-E15 · Physical variable map</a:t>
-            </a:r>
-          </a:p>
-        </p:txBody>
-      </p:sp>
-      <p:sp>
-        <p:nvSpPr>
-          <p:cNvPr id="3" name="ellipse 1" descr="sci-ppt:obj-001"/>
-          <p:cNvSpPr/>
+              <a:t>A-E15 · Signed-pressure and positive-loss check</a:t>
+            </a:r>
+          </a:p>
+        </p:txBody>
+      </p:sp>
+      <p:cxnSp>
+        <p:nvCxnSpPr>
+          <p:cNvPr id="3" name="A-E15 line 1" descr="sci-ppt:o001"/>
+          <p:cNvCxnSpPr/>
           <p:nvPr/>
-        </p:nvSpPr>
-        <p:spPr>
-          <a:xfrm>
-            <a:off x="1060704" y="914400"/>
-            <a:ext cx="1463040" cy="1463040"/>
-          </a:xfrm>
-          <a:prstGeom prst="ellipse">
+        </p:nvCxnSpPr>
+        <p:spPr>
+          <a:xfrm>
+            <a:off x="914400" y="4846320"/>
+            <a:ext cx="3108960" cy="0"/>
+          </a:xfrm>
+          <a:prstGeom prst="line">
             <a:avLst/>
           </a:prstGeom>
-          <a:noFill/>
-          <a:ln w="17780">
+          <a:ln w="19050">
             <a:solidFill>
               <a:srgbClr val="B4C7D2"/>
             </a:solidFill>
           </a:ln>
           <a:effectLst/>
         </p:spPr>
-        <p:txBody>
-          <a:bodyPr rtlCol="0" anchor="ctr"/>
-          <a:lstStyle/>
-          <a:p>
-            <a:pPr algn="ctr"/>
-          </a:p>
-        </p:txBody>
-      </p:sp>
-      <p:sp>
-        <p:nvSpPr>
-          <p:cNvPr id="4" name="ellipse 2" descr="sci-ppt:obj-002"/>
-          <p:cNvSpPr/>
+      </p:cxnSp>
+      <p:cxnSp>
+        <p:nvCxnSpPr>
+          <p:cNvPr id="4" name="A-E15 line 2" descr="sci-ppt:o002"/>
+          <p:cNvCxnSpPr/>
           <p:nvPr/>
-        </p:nvSpPr>
-        <p:spPr>
-          <a:xfrm>
-            <a:off x="1463040" y="1316736"/>
-            <a:ext cx="658368" cy="658368"/>
-          </a:xfrm>
-          <a:prstGeom prst="ellipse">
+        </p:nvCxnSpPr>
+        <p:spPr>
+          <a:xfrm>
+            <a:off x="914400" y="1371600"/>
+            <a:ext cx="0" cy="3474720"/>
+          </a:xfrm>
+          <a:prstGeom prst="line">
             <a:avLst/>
           </a:prstGeom>
-          <a:solidFill>
-            <a:srgbClr val="213E4B"/>
-          </a:solidFill>
-          <a:ln w="17780">
+          <a:ln w="19050">
             <a:solidFill>
               <a:srgbClr val="B4C7D2"/>
             </a:solidFill>
           </a:ln>
           <a:effectLst/>
         </p:spPr>
-        <p:txBody>
-          <a:bodyPr rtlCol="0" anchor="ctr"/>
-          <a:lstStyle/>
-          <a:p>
-            <a:pPr algn="ctr"/>
-          </a:p>
-        </p:txBody>
-      </p:sp>
+      </p:cxnSp>
       <p:cxnSp>
         <p:nvCxnSpPr>
-          <p:cNvPr id="5" name="arrow 3" descr="sci-ppt:obj-003"/>
+          <p:cNvPr id="5" name="A-E15 line 3" descr="sci-ppt:o003"/>
           <p:cNvCxnSpPr/>
           <p:nvPr/>
         </p:nvCxnSpPr>
         <p:spPr>
           <a:xfrm>
-            <a:off x="1792224" y="1645920"/>
-            <a:ext cx="329184" cy="0"/>
+            <a:off x="914400" y="4846320"/>
+            <a:ext cx="0" cy="64008"/>
           </a:xfrm>
           <a:prstGeom prst="line">
             <a:avLst/>
           </a:prstGeom>
-          <a:ln w="21590">
+          <a:ln w="12700">
             <a:solidFill>
-              <a:srgbClr val="8EDBD4"/>
+              <a:srgbClr val="B4C7D2"/>
             </a:solidFill>
-            <a:headEnd type="none" w="med" len="med"/>
-            <a:tailEnd type="triangle" w="med" len="med"/>
           </a:ln>
           <a:effectLst/>
         </p:spPr>
       </p:cxnSp>
-      <p:sp>
-        <p:nvSpPr>
-          <p:cNvPr id="6" name="text 4" descr="sci-ppt:obj-004"/>
+      <p:cxnSp>
+        <p:nvCxnSpPr>
+          <p:cNvPr id="6" name="A-E15 line 4" descr="sci-ppt:o004"/>
+          <p:cNvCxnSpPr/>
+          <p:nvPr/>
+        </p:nvCxnSpPr>
+        <p:spPr>
+          <a:xfrm>
+            <a:off x="914400" y="1371600"/>
+            <a:ext cx="0" cy="3474720"/>
+          </a:xfrm>
+          <a:prstGeom prst="line">
+            <a:avLst/>
+          </a:prstGeom>
+          <a:ln w="7620">
+            <a:solidFill>
+              <a:srgbClr val="2E4756"/>
+            </a:solidFill>
+          </a:ln>
+          <a:effectLst/>
+        </p:spPr>
+      </p:cxnSp>
+      <p:sp>
+        <p:nvSpPr>
+          <p:cNvPr id="7" name="A-E15 text 5" descr="sci-ppt:o005"/>
           <p:cNvSpPr txBox="1"/>
           <p:nvPr/>
         </p:nvSpPr>
         <p:spPr>
           <a:xfrm>
-            <a:off x="1755648" y="1271016"/>
-            <a:ext cx="1097280" cy="310896"/>
+            <a:off x="457200" y="4928616"/>
+            <a:ext cx="914400" cy="208407"/>
           </a:xfrm>
           <a:prstGeom prst="rect">
             <a:avLst/>
@@ -3240,7 +3242,613 @@
           <a:effectLst/>
         </p:spPr>
         <p:txBody>
-          <a:bodyPr wrap="none" lIns="0" rIns="0" tIns="0" bIns="0" anchor="ctr">
+          <a:bodyPr wrap="none" lIns="18288" rIns="18288" tIns="18288" bIns="18288" anchor="t">
+            <a:spAutoFit/>
+          </a:bodyPr>
+          <a:lstStyle/>
+          <a:p>
+            <a:pPr algn="ctr">
+              <a:spcAft>
+                <a:spcPts val="0"/>
+              </a:spcAft>
+            </a:pPr>
+            <a:r>
+              <a:rPr sz="1050" b="0" i="0">
+                <a:solidFill>
+                  <a:srgbClr val="B4C7D2"/>
+                </a:solidFill>
+                <a:latin typeface="Arial"/>
+              </a:rPr>
+              <a:t>-20</a:t>
+            </a:r>
+          </a:p>
+        </p:txBody>
+      </p:sp>
+      <p:cxnSp>
+        <p:nvCxnSpPr>
+          <p:cNvPr id="8" name="A-E15 line 6" descr="sci-ppt:o006"/>
+          <p:cNvCxnSpPr/>
+          <p:nvPr/>
+        </p:nvCxnSpPr>
+        <p:spPr>
+          <a:xfrm>
+            <a:off x="2468880" y="4846320"/>
+            <a:ext cx="0" cy="64008"/>
+          </a:xfrm>
+          <a:prstGeom prst="line">
+            <a:avLst/>
+          </a:prstGeom>
+          <a:ln w="12700">
+            <a:solidFill>
+              <a:srgbClr val="B4C7D2"/>
+            </a:solidFill>
+          </a:ln>
+          <a:effectLst/>
+        </p:spPr>
+      </p:cxnSp>
+      <p:cxnSp>
+        <p:nvCxnSpPr>
+          <p:cNvPr id="9" name="A-E15 line 7" descr="sci-ppt:o007"/>
+          <p:cNvCxnSpPr/>
+          <p:nvPr/>
+        </p:nvCxnSpPr>
+        <p:spPr>
+          <a:xfrm>
+            <a:off x="2468880" y="1371600"/>
+            <a:ext cx="0" cy="3474720"/>
+          </a:xfrm>
+          <a:prstGeom prst="line">
+            <a:avLst/>
+          </a:prstGeom>
+          <a:ln w="7620">
+            <a:solidFill>
+              <a:srgbClr val="2E4756"/>
+            </a:solidFill>
+          </a:ln>
+          <a:effectLst/>
+        </p:spPr>
+      </p:cxnSp>
+      <p:sp>
+        <p:nvSpPr>
+          <p:cNvPr id="10" name="A-E15 text 8" descr="sci-ppt:o008"/>
+          <p:cNvSpPr txBox="1"/>
+          <p:nvPr/>
+        </p:nvSpPr>
+        <p:spPr>
+          <a:xfrm>
+            <a:off x="2011680" y="4928616"/>
+            <a:ext cx="914400" cy="208407"/>
+          </a:xfrm>
+          <a:prstGeom prst="rect">
+            <a:avLst/>
+          </a:prstGeom>
+          <a:noFill/>
+          <a:effectLst/>
+        </p:spPr>
+        <p:txBody>
+          <a:bodyPr wrap="none" lIns="18288" rIns="18288" tIns="18288" bIns="18288" anchor="t">
+            <a:spAutoFit/>
+          </a:bodyPr>
+          <a:lstStyle/>
+          <a:p>
+            <a:pPr algn="ctr">
+              <a:spcAft>
+                <a:spcPts val="0"/>
+              </a:spcAft>
+            </a:pPr>
+            <a:r>
+              <a:rPr sz="1050" b="0" i="0">
+                <a:solidFill>
+                  <a:srgbClr val="B4C7D2"/>
+                </a:solidFill>
+                <a:latin typeface="Arial"/>
+              </a:rPr>
+              <a:t>0</a:t>
+            </a:r>
+          </a:p>
+        </p:txBody>
+      </p:sp>
+      <p:cxnSp>
+        <p:nvCxnSpPr>
+          <p:cNvPr id="11" name="A-E15 line 9" descr="sci-ppt:o009"/>
+          <p:cNvCxnSpPr/>
+          <p:nvPr/>
+        </p:nvCxnSpPr>
+        <p:spPr>
+          <a:xfrm>
+            <a:off x="4023360" y="4846320"/>
+            <a:ext cx="0" cy="64008"/>
+          </a:xfrm>
+          <a:prstGeom prst="line">
+            <a:avLst/>
+          </a:prstGeom>
+          <a:ln w="12700">
+            <a:solidFill>
+              <a:srgbClr val="B4C7D2"/>
+            </a:solidFill>
+          </a:ln>
+          <a:effectLst/>
+        </p:spPr>
+      </p:cxnSp>
+      <p:cxnSp>
+        <p:nvCxnSpPr>
+          <p:cNvPr id="12" name="A-E15 line 10" descr="sci-ppt:o010"/>
+          <p:cNvCxnSpPr/>
+          <p:nvPr/>
+        </p:nvCxnSpPr>
+        <p:spPr>
+          <a:xfrm>
+            <a:off x="4023360" y="1371600"/>
+            <a:ext cx="0" cy="3474720"/>
+          </a:xfrm>
+          <a:prstGeom prst="line">
+            <a:avLst/>
+          </a:prstGeom>
+          <a:ln w="7620">
+            <a:solidFill>
+              <a:srgbClr val="2E4756"/>
+            </a:solidFill>
+          </a:ln>
+          <a:effectLst/>
+        </p:spPr>
+      </p:cxnSp>
+      <p:sp>
+        <p:nvSpPr>
+          <p:cNvPr id="13" name="A-E15 text 11" descr="sci-ppt:o011"/>
+          <p:cNvSpPr txBox="1"/>
+          <p:nvPr/>
+        </p:nvSpPr>
+        <p:spPr>
+          <a:xfrm>
+            <a:off x="3566160" y="4928616"/>
+            <a:ext cx="914400" cy="208407"/>
+          </a:xfrm>
+          <a:prstGeom prst="rect">
+            <a:avLst/>
+          </a:prstGeom>
+          <a:noFill/>
+          <a:effectLst/>
+        </p:spPr>
+        <p:txBody>
+          <a:bodyPr wrap="none" lIns="18288" rIns="18288" tIns="18288" bIns="18288" anchor="t">
+            <a:spAutoFit/>
+          </a:bodyPr>
+          <a:lstStyle/>
+          <a:p>
+            <a:pPr algn="ctr">
+              <a:spcAft>
+                <a:spcPts val="0"/>
+              </a:spcAft>
+            </a:pPr>
+            <a:r>
+              <a:rPr sz="1050" b="0" i="0">
+                <a:solidFill>
+                  <a:srgbClr val="B4C7D2"/>
+                </a:solidFill>
+                <a:latin typeface="Arial"/>
+              </a:rPr>
+              <a:t>20</a:t>
+            </a:r>
+          </a:p>
+        </p:txBody>
+      </p:sp>
+      <p:cxnSp>
+        <p:nvCxnSpPr>
+          <p:cNvPr id="14" name="A-E15 line 12" descr="sci-ppt:o012"/>
+          <p:cNvCxnSpPr/>
+          <p:nvPr/>
+        </p:nvCxnSpPr>
+        <p:spPr>
+          <a:xfrm>
+            <a:off x="850392" y="4846320"/>
+            <a:ext cx="64008" cy="0"/>
+          </a:xfrm>
+          <a:prstGeom prst="line">
+            <a:avLst/>
+          </a:prstGeom>
+          <a:ln w="12700">
+            <a:solidFill>
+              <a:srgbClr val="B4C7D2"/>
+            </a:solidFill>
+          </a:ln>
+          <a:effectLst/>
+        </p:spPr>
+      </p:cxnSp>
+      <p:cxnSp>
+        <p:nvCxnSpPr>
+          <p:cNvPr id="15" name="A-E15 line 13" descr="sci-ppt:o013"/>
+          <p:cNvCxnSpPr/>
+          <p:nvPr/>
+        </p:nvCxnSpPr>
+        <p:spPr>
+          <a:xfrm>
+            <a:off x="850392" y="3977639"/>
+            <a:ext cx="64008" cy="0"/>
+          </a:xfrm>
+          <a:prstGeom prst="line">
+            <a:avLst/>
+          </a:prstGeom>
+          <a:ln w="12700">
+            <a:solidFill>
+              <a:srgbClr val="B4C7D2"/>
+            </a:solidFill>
+          </a:ln>
+          <a:effectLst/>
+        </p:spPr>
+      </p:cxnSp>
+      <p:cxnSp>
+        <p:nvCxnSpPr>
+          <p:cNvPr id="16" name="A-E15 line 14" descr="sci-ppt:o014"/>
+          <p:cNvCxnSpPr/>
+          <p:nvPr/>
+        </p:nvCxnSpPr>
+        <p:spPr>
+          <a:xfrm>
+            <a:off x="914400" y="3977639"/>
+            <a:ext cx="3108960" cy="0"/>
+          </a:xfrm>
+          <a:prstGeom prst="line">
+            <a:avLst/>
+          </a:prstGeom>
+          <a:ln w="7620">
+            <a:solidFill>
+              <a:srgbClr val="2E4756"/>
+            </a:solidFill>
+          </a:ln>
+          <a:effectLst/>
+        </p:spPr>
+      </p:cxnSp>
+      <p:sp>
+        <p:nvSpPr>
+          <p:cNvPr id="17" name="A-E15 text 15" descr="sci-ppt:o015"/>
+          <p:cNvSpPr txBox="1"/>
+          <p:nvPr/>
+        </p:nvSpPr>
+        <p:spPr>
+          <a:xfrm>
+            <a:off x="45720" y="3895344"/>
+            <a:ext cx="777240" cy="208407"/>
+          </a:xfrm>
+          <a:prstGeom prst="rect">
+            <a:avLst/>
+          </a:prstGeom>
+          <a:noFill/>
+          <a:effectLst/>
+        </p:spPr>
+        <p:txBody>
+          <a:bodyPr wrap="none" lIns="18288" rIns="18288" tIns="18288" bIns="18288" anchor="t">
+            <a:spAutoFit/>
+          </a:bodyPr>
+          <a:lstStyle/>
+          <a:p>
+            <a:pPr algn="r">
+              <a:spcAft>
+                <a:spcPts val="0"/>
+              </a:spcAft>
+            </a:pPr>
+            <a:r>
+              <a:rPr sz="1050" b="0" i="0">
+                <a:solidFill>
+                  <a:srgbClr val="B4C7D2"/>
+                </a:solidFill>
+                <a:latin typeface="Arial"/>
+              </a:rPr>
+              <a:t>-15</a:t>
+            </a:r>
+          </a:p>
+        </p:txBody>
+      </p:sp>
+      <p:cxnSp>
+        <p:nvCxnSpPr>
+          <p:cNvPr id="18" name="A-E15 line 16" descr="sci-ppt:o016"/>
+          <p:cNvCxnSpPr/>
+          <p:nvPr/>
+        </p:nvCxnSpPr>
+        <p:spPr>
+          <a:xfrm>
+            <a:off x="850392" y="3108960"/>
+            <a:ext cx="64008" cy="0"/>
+          </a:xfrm>
+          <a:prstGeom prst="line">
+            <a:avLst/>
+          </a:prstGeom>
+          <a:ln w="12700">
+            <a:solidFill>
+              <a:srgbClr val="B4C7D2"/>
+            </a:solidFill>
+          </a:ln>
+          <a:effectLst/>
+        </p:spPr>
+      </p:cxnSp>
+      <p:cxnSp>
+        <p:nvCxnSpPr>
+          <p:cNvPr id="19" name="A-E15 line 17" descr="sci-ppt:o017"/>
+          <p:cNvCxnSpPr/>
+          <p:nvPr/>
+        </p:nvCxnSpPr>
+        <p:spPr>
+          <a:xfrm>
+            <a:off x="914400" y="3108960"/>
+            <a:ext cx="3108960" cy="0"/>
+          </a:xfrm>
+          <a:prstGeom prst="line">
+            <a:avLst/>
+          </a:prstGeom>
+          <a:ln w="7620">
+            <a:solidFill>
+              <a:srgbClr val="2E4756"/>
+            </a:solidFill>
+          </a:ln>
+          <a:effectLst/>
+        </p:spPr>
+      </p:cxnSp>
+      <p:sp>
+        <p:nvSpPr>
+          <p:cNvPr id="20" name="A-E15 text 18" descr="sci-ppt:o018"/>
+          <p:cNvSpPr txBox="1"/>
+          <p:nvPr/>
+        </p:nvSpPr>
+        <p:spPr>
+          <a:xfrm>
+            <a:off x="45720" y="3026664"/>
+            <a:ext cx="777240" cy="208407"/>
+          </a:xfrm>
+          <a:prstGeom prst="rect">
+            <a:avLst/>
+          </a:prstGeom>
+          <a:noFill/>
+          <a:effectLst/>
+        </p:spPr>
+        <p:txBody>
+          <a:bodyPr wrap="none" lIns="18288" rIns="18288" tIns="18288" bIns="18288" anchor="t">
+            <a:spAutoFit/>
+          </a:bodyPr>
+          <a:lstStyle/>
+          <a:p>
+            <a:pPr algn="r">
+              <a:spcAft>
+                <a:spcPts val="0"/>
+              </a:spcAft>
+            </a:pPr>
+            <a:r>
+              <a:rPr sz="1050" b="0" i="0">
+                <a:solidFill>
+                  <a:srgbClr val="B4C7D2"/>
+                </a:solidFill>
+                <a:latin typeface="Arial"/>
+              </a:rPr>
+              <a:t>0</a:t>
+            </a:r>
+          </a:p>
+        </p:txBody>
+      </p:sp>
+      <p:cxnSp>
+        <p:nvCxnSpPr>
+          <p:cNvPr id="21" name="A-E15 line 19" descr="sci-ppt:o019"/>
+          <p:cNvCxnSpPr/>
+          <p:nvPr/>
+        </p:nvCxnSpPr>
+        <p:spPr>
+          <a:xfrm>
+            <a:off x="850392" y="2240280"/>
+            <a:ext cx="64008" cy="0"/>
+          </a:xfrm>
+          <a:prstGeom prst="line">
+            <a:avLst/>
+          </a:prstGeom>
+          <a:ln w="12700">
+            <a:solidFill>
+              <a:srgbClr val="B4C7D2"/>
+            </a:solidFill>
+          </a:ln>
+          <a:effectLst/>
+        </p:spPr>
+      </p:cxnSp>
+      <p:cxnSp>
+        <p:nvCxnSpPr>
+          <p:cNvPr id="22" name="A-E15 line 20" descr="sci-ppt:o020"/>
+          <p:cNvCxnSpPr/>
+          <p:nvPr/>
+        </p:nvCxnSpPr>
+        <p:spPr>
+          <a:xfrm>
+            <a:off x="914400" y="2240280"/>
+            <a:ext cx="3108960" cy="0"/>
+          </a:xfrm>
+          <a:prstGeom prst="line">
+            <a:avLst/>
+          </a:prstGeom>
+          <a:ln w="7620">
+            <a:solidFill>
+              <a:srgbClr val="2E4756"/>
+            </a:solidFill>
+          </a:ln>
+          <a:effectLst/>
+        </p:spPr>
+      </p:cxnSp>
+      <p:sp>
+        <p:nvSpPr>
+          <p:cNvPr id="23" name="A-E15 text 21" descr="sci-ppt:o021"/>
+          <p:cNvSpPr txBox="1"/>
+          <p:nvPr/>
+        </p:nvSpPr>
+        <p:spPr>
+          <a:xfrm>
+            <a:off x="45720" y="2157984"/>
+            <a:ext cx="777240" cy="208407"/>
+          </a:xfrm>
+          <a:prstGeom prst="rect">
+            <a:avLst/>
+          </a:prstGeom>
+          <a:noFill/>
+          <a:effectLst/>
+        </p:spPr>
+        <p:txBody>
+          <a:bodyPr wrap="none" lIns="18288" rIns="18288" tIns="18288" bIns="18288" anchor="t">
+            <a:spAutoFit/>
+          </a:bodyPr>
+          <a:lstStyle/>
+          <a:p>
+            <a:pPr algn="r">
+              <a:spcAft>
+                <a:spcPts val="0"/>
+              </a:spcAft>
+            </a:pPr>
+            <a:r>
+              <a:rPr sz="1050" b="0" i="0">
+                <a:solidFill>
+                  <a:srgbClr val="B4C7D2"/>
+                </a:solidFill>
+                <a:latin typeface="Arial"/>
+              </a:rPr>
+              <a:t>15</a:t>
+            </a:r>
+          </a:p>
+        </p:txBody>
+      </p:sp>
+      <p:cxnSp>
+        <p:nvCxnSpPr>
+          <p:cNvPr id="24" name="A-E15 line 22" descr="sci-ppt:o022"/>
+          <p:cNvCxnSpPr/>
+          <p:nvPr/>
+        </p:nvCxnSpPr>
+        <p:spPr>
+          <a:xfrm>
+            <a:off x="850392" y="1371600"/>
+            <a:ext cx="64008" cy="0"/>
+          </a:xfrm>
+          <a:prstGeom prst="line">
+            <a:avLst/>
+          </a:prstGeom>
+          <a:ln w="12700">
+            <a:solidFill>
+              <a:srgbClr val="B4C7D2"/>
+            </a:solidFill>
+          </a:ln>
+          <a:effectLst/>
+        </p:spPr>
+      </p:cxnSp>
+      <p:cxnSp>
+        <p:nvCxnSpPr>
+          <p:cNvPr id="25" name="A-E15 line 23" descr="sci-ppt:o023"/>
+          <p:cNvCxnSpPr/>
+          <p:nvPr/>
+        </p:nvCxnSpPr>
+        <p:spPr>
+          <a:xfrm>
+            <a:off x="914400" y="1371600"/>
+            <a:ext cx="3108960" cy="0"/>
+          </a:xfrm>
+          <a:prstGeom prst="line">
+            <a:avLst/>
+          </a:prstGeom>
+          <a:ln w="7620">
+            <a:solidFill>
+              <a:srgbClr val="2E4756"/>
+            </a:solidFill>
+          </a:ln>
+          <a:effectLst/>
+        </p:spPr>
+      </p:cxnSp>
+      <p:sp>
+        <p:nvSpPr>
+          <p:cNvPr id="26" name="A-E15 text 24" descr="sci-ppt:o024"/>
+          <p:cNvSpPr txBox="1"/>
+          <p:nvPr/>
+        </p:nvSpPr>
+        <p:spPr>
+          <a:xfrm>
+            <a:off x="45720" y="1289304"/>
+            <a:ext cx="777240" cy="208407"/>
+          </a:xfrm>
+          <a:prstGeom prst="rect">
+            <a:avLst/>
+          </a:prstGeom>
+          <a:noFill/>
+          <a:effectLst/>
+        </p:spPr>
+        <p:txBody>
+          <a:bodyPr wrap="none" lIns="18288" rIns="18288" tIns="18288" bIns="18288" anchor="t">
+            <a:spAutoFit/>
+          </a:bodyPr>
+          <a:lstStyle/>
+          <a:p>
+            <a:pPr algn="r">
+              <a:spcAft>
+                <a:spcPts val="0"/>
+              </a:spcAft>
+            </a:pPr>
+            <a:r>
+              <a:rPr sz="1050" b="0" i="0">
+                <a:solidFill>
+                  <a:srgbClr val="B4C7D2"/>
+                </a:solidFill>
+                <a:latin typeface="Arial"/>
+              </a:rPr>
+              <a:t>30</a:t>
+            </a:r>
+          </a:p>
+        </p:txBody>
+      </p:sp>
+      <p:sp>
+        <p:nvSpPr>
+          <p:cNvPr id="27" name="A-E15 text 25" descr="sci-ppt:o025"/>
+          <p:cNvSpPr txBox="1"/>
+          <p:nvPr/>
+        </p:nvSpPr>
+        <p:spPr>
+          <a:xfrm>
+            <a:off x="914400" y="5129783"/>
+            <a:ext cx="3108960" cy="231648"/>
+          </a:xfrm>
+          <a:prstGeom prst="rect">
+            <a:avLst/>
+          </a:prstGeom>
+          <a:noFill/>
+          <a:effectLst/>
+        </p:spPr>
+        <p:txBody>
+          <a:bodyPr wrap="none" lIns="18288" rIns="18288" tIns="18288" bIns="18288" anchor="t">
+            <a:spAutoFit/>
+          </a:bodyPr>
+          <a:lstStyle/>
+          <a:p>
+            <a:pPr algn="ctr">
+              <a:spcAft>
+                <a:spcPts val="0"/>
+              </a:spcAft>
+            </a:pPr>
+            <a:r>
+              <a:rPr sz="1200" b="0" i="0">
+                <a:solidFill>
+                  <a:srgbClr val="E7F0F3"/>
+                </a:solidFill>
+                <a:latin typeface="Arial"/>
+              </a:rPr>
+              <a:t>wall speed Ṙ  (m/s)</a:t>
+            </a:r>
+          </a:p>
+        </p:txBody>
+      </p:sp>
+      <p:sp>
+        <p:nvSpPr>
+          <p:cNvPr id="28" name="A-E15 text 26" descr="sci-ppt:o026"/>
+          <p:cNvSpPr txBox="1"/>
+          <p:nvPr/>
+        </p:nvSpPr>
+        <p:spPr>
+          <a:xfrm>
+            <a:off x="365760" y="1024128"/>
+            <a:ext cx="3108960" cy="231648"/>
+          </a:xfrm>
+          <a:prstGeom prst="rect">
+            <a:avLst/>
+          </a:prstGeom>
+          <a:noFill/>
+          <a:effectLst/>
+        </p:spPr>
+        <p:txBody>
+          <a:bodyPr wrap="none" lIns="18288" rIns="18288" tIns="18288" bIns="18288" anchor="t">
             <a:spAutoFit/>
           </a:bodyPr>
           <a:lstStyle/>
@@ -3251,51 +3859,697 @@
               </a:spcAft>
             </a:pPr>
             <a:r>
-              <a:rPr sz="1296" b="0" i="0">
+              <a:rPr sz="1200" b="0" i="0">
                 <a:solidFill>
                   <a:srgbClr val="E7F0F3"/>
                 </a:solidFill>
                 <a:latin typeface="Arial"/>
               </a:rPr>
-              <a:t>Rref</a:t>
-            </a:r>
-          </a:p>
-        </p:txBody>
-      </p:sp>
-      <p:cxnSp>
-        <p:nvCxnSpPr>
-          <p:cNvPr id="7" name="arrow 5" descr="sci-ppt:obj-005"/>
-          <p:cNvCxnSpPr/>
+              <a:t>RHS viscous term (kPa)</a:t>
+            </a:r>
+          </a:p>
+        </p:txBody>
+      </p:sp>
+      <p:sp>
+        <p:nvSpPr>
+          <p:cNvPr id="29" name="A-E15 polygon 27" descr="sci-ppt:o027"/>
+          <p:cNvSpPr/>
           <p:nvPr/>
-        </p:nvCxnSpPr>
-        <p:spPr>
-          <a:xfrm>
-            <a:off x="1792224" y="1645920"/>
-            <a:ext cx="517262" cy="517262"/>
-          </a:xfrm>
-          <a:prstGeom prst="line">
-            <a:avLst/>
-          </a:prstGeom>
-          <a:ln w="21590">
+        </p:nvSpPr>
+        <p:spPr>
+          <a:xfrm>
+            <a:off x="914400" y="1564639"/>
+            <a:ext cx="3108960" cy="3088641"/>
+          </a:xfrm>
+          <a:custGeom>
+            <a:avLst/>
+            <a:gdLst/>
+            <a:ahLst/>
+            <a:cxnLst/>
+            <a:rect l="l" t="t" r="r" b="b"/>
+            <a:pathLst>
+              <a:path w="3108960" h="3088641">
+                <a:moveTo>
+                  <a:pt x="0" y="0"/>
+                </a:moveTo>
+                <a:lnTo>
+                  <a:pt x="15622" y="15521"/>
+                </a:lnTo>
+                <a:lnTo>
+                  <a:pt x="31245" y="31042"/>
+                </a:lnTo>
+                <a:lnTo>
+                  <a:pt x="46868" y="46563"/>
+                </a:lnTo>
+                <a:lnTo>
+                  <a:pt x="62491" y="62084"/>
+                </a:lnTo>
+                <a:lnTo>
+                  <a:pt x="78114" y="77605"/>
+                </a:lnTo>
+                <a:lnTo>
+                  <a:pt x="93737" y="93125"/>
+                </a:lnTo>
+                <a:lnTo>
+                  <a:pt x="109360" y="108646"/>
+                </a:lnTo>
+                <a:lnTo>
+                  <a:pt x="124983" y="124167"/>
+                </a:lnTo>
+                <a:lnTo>
+                  <a:pt x="140606" y="139688"/>
+                </a:lnTo>
+                <a:lnTo>
+                  <a:pt x="156229" y="155209"/>
+                </a:lnTo>
+                <a:lnTo>
+                  <a:pt x="171852" y="170729"/>
+                </a:lnTo>
+                <a:lnTo>
+                  <a:pt x="187474" y="186250"/>
+                </a:lnTo>
+                <a:lnTo>
+                  <a:pt x="203097" y="201771"/>
+                </a:lnTo>
+                <a:lnTo>
+                  <a:pt x="218720" y="217292"/>
+                </a:lnTo>
+                <a:lnTo>
+                  <a:pt x="234343" y="232813"/>
+                </a:lnTo>
+                <a:lnTo>
+                  <a:pt x="249966" y="248333"/>
+                </a:lnTo>
+                <a:lnTo>
+                  <a:pt x="265589" y="263854"/>
+                </a:lnTo>
+                <a:lnTo>
+                  <a:pt x="281212" y="279375"/>
+                </a:lnTo>
+                <a:lnTo>
+                  <a:pt x="296835" y="294896"/>
+                </a:lnTo>
+                <a:lnTo>
+                  <a:pt x="312458" y="310417"/>
+                </a:lnTo>
+                <a:lnTo>
+                  <a:pt x="328081" y="325937"/>
+                </a:lnTo>
+                <a:lnTo>
+                  <a:pt x="343704" y="341458"/>
+                </a:lnTo>
+                <a:lnTo>
+                  <a:pt x="359327" y="356979"/>
+                </a:lnTo>
+                <a:lnTo>
+                  <a:pt x="374949" y="372500"/>
+                </a:lnTo>
+                <a:lnTo>
+                  <a:pt x="390572" y="388021"/>
+                </a:lnTo>
+                <a:lnTo>
+                  <a:pt x="406195" y="403541"/>
+                </a:lnTo>
+                <a:lnTo>
+                  <a:pt x="421818" y="419062"/>
+                </a:lnTo>
+                <a:lnTo>
+                  <a:pt x="437441" y="434583"/>
+                </a:lnTo>
+                <a:lnTo>
+                  <a:pt x="453064" y="450104"/>
+                </a:lnTo>
+                <a:lnTo>
+                  <a:pt x="468687" y="465625"/>
+                </a:lnTo>
+                <a:lnTo>
+                  <a:pt x="484310" y="481145"/>
+                </a:lnTo>
+                <a:lnTo>
+                  <a:pt x="499933" y="496666"/>
+                </a:lnTo>
+                <a:lnTo>
+                  <a:pt x="515556" y="512187"/>
+                </a:lnTo>
+                <a:lnTo>
+                  <a:pt x="531179" y="527708"/>
+                </a:lnTo>
+                <a:lnTo>
+                  <a:pt x="546802" y="543229"/>
+                </a:lnTo>
+                <a:lnTo>
+                  <a:pt x="562424" y="558749"/>
+                </a:lnTo>
+                <a:lnTo>
+                  <a:pt x="578047" y="574270"/>
+                </a:lnTo>
+                <a:lnTo>
+                  <a:pt x="593670" y="589791"/>
+                </a:lnTo>
+                <a:lnTo>
+                  <a:pt x="609293" y="605312"/>
+                </a:lnTo>
+                <a:lnTo>
+                  <a:pt x="624916" y="620833"/>
+                </a:lnTo>
+                <a:lnTo>
+                  <a:pt x="640539" y="636353"/>
+                </a:lnTo>
+                <a:lnTo>
+                  <a:pt x="656162" y="651874"/>
+                </a:lnTo>
+                <a:lnTo>
+                  <a:pt x="671785" y="667395"/>
+                </a:lnTo>
+                <a:lnTo>
+                  <a:pt x="687408" y="682916"/>
+                </a:lnTo>
+                <a:lnTo>
+                  <a:pt x="703031" y="698437"/>
+                </a:lnTo>
+                <a:lnTo>
+                  <a:pt x="718654" y="713957"/>
+                </a:lnTo>
+                <a:lnTo>
+                  <a:pt x="734276" y="729478"/>
+                </a:lnTo>
+                <a:lnTo>
+                  <a:pt x="749899" y="744999"/>
+                </a:lnTo>
+                <a:lnTo>
+                  <a:pt x="765522" y="760520"/>
+                </a:lnTo>
+                <a:lnTo>
+                  <a:pt x="781145" y="776041"/>
+                </a:lnTo>
+                <a:lnTo>
+                  <a:pt x="796768" y="791562"/>
+                </a:lnTo>
+                <a:lnTo>
+                  <a:pt x="812391" y="807082"/>
+                </a:lnTo>
+                <a:lnTo>
+                  <a:pt x="828014" y="822603"/>
+                </a:lnTo>
+                <a:lnTo>
+                  <a:pt x="843637" y="838124"/>
+                </a:lnTo>
+                <a:lnTo>
+                  <a:pt x="859260" y="853645"/>
+                </a:lnTo>
+                <a:lnTo>
+                  <a:pt x="874883" y="869166"/>
+                </a:lnTo>
+                <a:lnTo>
+                  <a:pt x="890506" y="884686"/>
+                </a:lnTo>
+                <a:lnTo>
+                  <a:pt x="906129" y="900207"/>
+                </a:lnTo>
+                <a:lnTo>
+                  <a:pt x="921751" y="915728"/>
+                </a:lnTo>
+                <a:lnTo>
+                  <a:pt x="937374" y="931249"/>
+                </a:lnTo>
+                <a:lnTo>
+                  <a:pt x="952997" y="946770"/>
+                </a:lnTo>
+                <a:lnTo>
+                  <a:pt x="968620" y="962290"/>
+                </a:lnTo>
+                <a:lnTo>
+                  <a:pt x="984243" y="977811"/>
+                </a:lnTo>
+                <a:lnTo>
+                  <a:pt x="999866" y="993332"/>
+                </a:lnTo>
+                <a:lnTo>
+                  <a:pt x="1015489" y="1008853"/>
+                </a:lnTo>
+                <a:lnTo>
+                  <a:pt x="1031112" y="1024374"/>
+                </a:lnTo>
+                <a:lnTo>
+                  <a:pt x="1046735" y="1039894"/>
+                </a:lnTo>
+                <a:lnTo>
+                  <a:pt x="1062358" y="1055415"/>
+                </a:lnTo>
+                <a:lnTo>
+                  <a:pt x="1077981" y="1070936"/>
+                </a:lnTo>
+                <a:lnTo>
+                  <a:pt x="1093604" y="1086457"/>
+                </a:lnTo>
+                <a:lnTo>
+                  <a:pt x="1109226" y="1101978"/>
+                </a:lnTo>
+                <a:lnTo>
+                  <a:pt x="1124849" y="1117498"/>
+                </a:lnTo>
+                <a:lnTo>
+                  <a:pt x="1140472" y="1133019"/>
+                </a:lnTo>
+                <a:lnTo>
+                  <a:pt x="1156095" y="1148540"/>
+                </a:lnTo>
+                <a:lnTo>
+                  <a:pt x="1171718" y="1164061"/>
+                </a:lnTo>
+                <a:lnTo>
+                  <a:pt x="1187341" y="1179582"/>
+                </a:lnTo>
+                <a:lnTo>
+                  <a:pt x="1202964" y="1195102"/>
+                </a:lnTo>
+                <a:lnTo>
+                  <a:pt x="1218587" y="1210623"/>
+                </a:lnTo>
+                <a:lnTo>
+                  <a:pt x="1234210" y="1226144"/>
+                </a:lnTo>
+                <a:lnTo>
+                  <a:pt x="1249833" y="1241665"/>
+                </a:lnTo>
+                <a:lnTo>
+                  <a:pt x="1265456" y="1257186"/>
+                </a:lnTo>
+                <a:lnTo>
+                  <a:pt x="1281078" y="1272706"/>
+                </a:lnTo>
+                <a:lnTo>
+                  <a:pt x="1296701" y="1288227"/>
+                </a:lnTo>
+                <a:lnTo>
+                  <a:pt x="1312324" y="1303748"/>
+                </a:lnTo>
+                <a:lnTo>
+                  <a:pt x="1327947" y="1319269"/>
+                </a:lnTo>
+                <a:lnTo>
+                  <a:pt x="1343570" y="1334790"/>
+                </a:lnTo>
+                <a:lnTo>
+                  <a:pt x="1359193" y="1350310"/>
+                </a:lnTo>
+                <a:lnTo>
+                  <a:pt x="1374816" y="1365831"/>
+                </a:lnTo>
+                <a:lnTo>
+                  <a:pt x="1390439" y="1381352"/>
+                </a:lnTo>
+                <a:lnTo>
+                  <a:pt x="1406062" y="1396873"/>
+                </a:lnTo>
+                <a:lnTo>
+                  <a:pt x="1421685" y="1412394"/>
+                </a:lnTo>
+                <a:lnTo>
+                  <a:pt x="1437308" y="1427914"/>
+                </a:lnTo>
+                <a:lnTo>
+                  <a:pt x="1452931" y="1443435"/>
+                </a:lnTo>
+                <a:lnTo>
+                  <a:pt x="1468553" y="1458956"/>
+                </a:lnTo>
+                <a:lnTo>
+                  <a:pt x="1484176" y="1474477"/>
+                </a:lnTo>
+                <a:lnTo>
+                  <a:pt x="1499799" y="1489998"/>
+                </a:lnTo>
+                <a:lnTo>
+                  <a:pt x="1515422" y="1505518"/>
+                </a:lnTo>
+                <a:lnTo>
+                  <a:pt x="1531045" y="1521039"/>
+                </a:lnTo>
+                <a:lnTo>
+                  <a:pt x="1546668" y="1536560"/>
+                </a:lnTo>
+                <a:lnTo>
+                  <a:pt x="1562291" y="1552081"/>
+                </a:lnTo>
+                <a:lnTo>
+                  <a:pt x="1577914" y="1567602"/>
+                </a:lnTo>
+                <a:lnTo>
+                  <a:pt x="1593537" y="1583123"/>
+                </a:lnTo>
+                <a:lnTo>
+                  <a:pt x="1609160" y="1598643"/>
+                </a:lnTo>
+                <a:lnTo>
+                  <a:pt x="1624783" y="1614164"/>
+                </a:lnTo>
+                <a:lnTo>
+                  <a:pt x="1640406" y="1629685"/>
+                </a:lnTo>
+                <a:lnTo>
+                  <a:pt x="1656028" y="1645206"/>
+                </a:lnTo>
+                <a:lnTo>
+                  <a:pt x="1671651" y="1660727"/>
+                </a:lnTo>
+                <a:lnTo>
+                  <a:pt x="1687274" y="1676247"/>
+                </a:lnTo>
+                <a:lnTo>
+                  <a:pt x="1702897" y="1691768"/>
+                </a:lnTo>
+                <a:lnTo>
+                  <a:pt x="1718520" y="1707289"/>
+                </a:lnTo>
+                <a:lnTo>
+                  <a:pt x="1734143" y="1722810"/>
+                </a:lnTo>
+                <a:lnTo>
+                  <a:pt x="1749766" y="1738331"/>
+                </a:lnTo>
+                <a:lnTo>
+                  <a:pt x="1765389" y="1753851"/>
+                </a:lnTo>
+                <a:lnTo>
+                  <a:pt x="1781012" y="1769372"/>
+                </a:lnTo>
+                <a:lnTo>
+                  <a:pt x="1796635" y="1784893"/>
+                </a:lnTo>
+                <a:lnTo>
+                  <a:pt x="1812258" y="1800414"/>
+                </a:lnTo>
+                <a:lnTo>
+                  <a:pt x="1827881" y="1815935"/>
+                </a:lnTo>
+                <a:lnTo>
+                  <a:pt x="1843503" y="1831455"/>
+                </a:lnTo>
+                <a:lnTo>
+                  <a:pt x="1859126" y="1846976"/>
+                </a:lnTo>
+                <a:lnTo>
+                  <a:pt x="1874749" y="1862497"/>
+                </a:lnTo>
+                <a:lnTo>
+                  <a:pt x="1890372" y="1878018"/>
+                </a:lnTo>
+                <a:lnTo>
+                  <a:pt x="1905995" y="1893539"/>
+                </a:lnTo>
+                <a:lnTo>
+                  <a:pt x="1921618" y="1909059"/>
+                </a:lnTo>
+                <a:lnTo>
+                  <a:pt x="1937241" y="1924580"/>
+                </a:lnTo>
+                <a:lnTo>
+                  <a:pt x="1952864" y="1940101"/>
+                </a:lnTo>
+                <a:lnTo>
+                  <a:pt x="1968487" y="1955622"/>
+                </a:lnTo>
+                <a:lnTo>
+                  <a:pt x="1984110" y="1971143"/>
+                </a:lnTo>
+                <a:lnTo>
+                  <a:pt x="1999733" y="1986663"/>
+                </a:lnTo>
+                <a:lnTo>
+                  <a:pt x="2015355" y="2002184"/>
+                </a:lnTo>
+                <a:lnTo>
+                  <a:pt x="2030978" y="2017705"/>
+                </a:lnTo>
+                <a:lnTo>
+                  <a:pt x="2046601" y="2033226"/>
+                </a:lnTo>
+                <a:lnTo>
+                  <a:pt x="2062224" y="2048747"/>
+                </a:lnTo>
+                <a:lnTo>
+                  <a:pt x="2077847" y="2064267"/>
+                </a:lnTo>
+                <a:lnTo>
+                  <a:pt x="2093470" y="2079788"/>
+                </a:lnTo>
+                <a:lnTo>
+                  <a:pt x="2109093" y="2095309"/>
+                </a:lnTo>
+                <a:lnTo>
+                  <a:pt x="2124716" y="2110830"/>
+                </a:lnTo>
+                <a:lnTo>
+                  <a:pt x="2140339" y="2126351"/>
+                </a:lnTo>
+                <a:lnTo>
+                  <a:pt x="2155962" y="2141871"/>
+                </a:lnTo>
+                <a:lnTo>
+                  <a:pt x="2171585" y="2157392"/>
+                </a:lnTo>
+                <a:lnTo>
+                  <a:pt x="2187208" y="2172913"/>
+                </a:lnTo>
+                <a:lnTo>
+                  <a:pt x="2202830" y="2188434"/>
+                </a:lnTo>
+                <a:lnTo>
+                  <a:pt x="2218453" y="2203955"/>
+                </a:lnTo>
+                <a:lnTo>
+                  <a:pt x="2234076" y="2219475"/>
+                </a:lnTo>
+                <a:lnTo>
+                  <a:pt x="2249699" y="2234996"/>
+                </a:lnTo>
+                <a:lnTo>
+                  <a:pt x="2265322" y="2250517"/>
+                </a:lnTo>
+                <a:lnTo>
+                  <a:pt x="2280945" y="2266038"/>
+                </a:lnTo>
+                <a:lnTo>
+                  <a:pt x="2296568" y="2281559"/>
+                </a:lnTo>
+                <a:lnTo>
+                  <a:pt x="2312191" y="2297079"/>
+                </a:lnTo>
+                <a:lnTo>
+                  <a:pt x="2327814" y="2312600"/>
+                </a:lnTo>
+                <a:lnTo>
+                  <a:pt x="2343437" y="2328121"/>
+                </a:lnTo>
+                <a:lnTo>
+                  <a:pt x="2359060" y="2343642"/>
+                </a:lnTo>
+                <a:lnTo>
+                  <a:pt x="2374683" y="2359163"/>
+                </a:lnTo>
+                <a:lnTo>
+                  <a:pt x="2390305" y="2374684"/>
+                </a:lnTo>
+                <a:lnTo>
+                  <a:pt x="2405928" y="2390204"/>
+                </a:lnTo>
+                <a:lnTo>
+                  <a:pt x="2421551" y="2405725"/>
+                </a:lnTo>
+                <a:lnTo>
+                  <a:pt x="2437174" y="2421246"/>
+                </a:lnTo>
+                <a:lnTo>
+                  <a:pt x="2452797" y="2436767"/>
+                </a:lnTo>
+                <a:lnTo>
+                  <a:pt x="2468420" y="2452288"/>
+                </a:lnTo>
+                <a:lnTo>
+                  <a:pt x="2484043" y="2467808"/>
+                </a:lnTo>
+                <a:lnTo>
+                  <a:pt x="2499666" y="2483329"/>
+                </a:lnTo>
+                <a:lnTo>
+                  <a:pt x="2515289" y="2498850"/>
+                </a:lnTo>
+                <a:lnTo>
+                  <a:pt x="2530912" y="2514371"/>
+                </a:lnTo>
+                <a:lnTo>
+                  <a:pt x="2546535" y="2529892"/>
+                </a:lnTo>
+                <a:lnTo>
+                  <a:pt x="2562157" y="2545412"/>
+                </a:lnTo>
+                <a:lnTo>
+                  <a:pt x="2577780" y="2560933"/>
+                </a:lnTo>
+                <a:lnTo>
+                  <a:pt x="2593403" y="2576454"/>
+                </a:lnTo>
+                <a:lnTo>
+                  <a:pt x="2609026" y="2591975"/>
+                </a:lnTo>
+                <a:lnTo>
+                  <a:pt x="2624649" y="2607496"/>
+                </a:lnTo>
+                <a:lnTo>
+                  <a:pt x="2640272" y="2623016"/>
+                </a:lnTo>
+                <a:lnTo>
+                  <a:pt x="2655895" y="2638537"/>
+                </a:lnTo>
+                <a:lnTo>
+                  <a:pt x="2671518" y="2654058"/>
+                </a:lnTo>
+                <a:lnTo>
+                  <a:pt x="2687141" y="2669579"/>
+                </a:lnTo>
+                <a:lnTo>
+                  <a:pt x="2702764" y="2685100"/>
+                </a:lnTo>
+                <a:lnTo>
+                  <a:pt x="2718387" y="2700620"/>
+                </a:lnTo>
+                <a:lnTo>
+                  <a:pt x="2734010" y="2716141"/>
+                </a:lnTo>
+                <a:lnTo>
+                  <a:pt x="2749632" y="2731662"/>
+                </a:lnTo>
+                <a:lnTo>
+                  <a:pt x="2765255" y="2747183"/>
+                </a:lnTo>
+                <a:lnTo>
+                  <a:pt x="2780878" y="2762704"/>
+                </a:lnTo>
+                <a:lnTo>
+                  <a:pt x="2796501" y="2778224"/>
+                </a:lnTo>
+                <a:lnTo>
+                  <a:pt x="2812124" y="2793745"/>
+                </a:lnTo>
+                <a:lnTo>
+                  <a:pt x="2827747" y="2809266"/>
+                </a:lnTo>
+                <a:lnTo>
+                  <a:pt x="2843370" y="2824787"/>
+                </a:lnTo>
+                <a:lnTo>
+                  <a:pt x="2858993" y="2840308"/>
+                </a:lnTo>
+                <a:lnTo>
+                  <a:pt x="2874616" y="2855828"/>
+                </a:lnTo>
+                <a:lnTo>
+                  <a:pt x="2890239" y="2871349"/>
+                </a:lnTo>
+                <a:lnTo>
+                  <a:pt x="2905862" y="2886870"/>
+                </a:lnTo>
+                <a:lnTo>
+                  <a:pt x="2921485" y="2902391"/>
+                </a:lnTo>
+                <a:lnTo>
+                  <a:pt x="2937107" y="2917912"/>
+                </a:lnTo>
+                <a:lnTo>
+                  <a:pt x="2952730" y="2933432"/>
+                </a:lnTo>
+                <a:lnTo>
+                  <a:pt x="2968353" y="2948953"/>
+                </a:lnTo>
+                <a:lnTo>
+                  <a:pt x="2983976" y="2964474"/>
+                </a:lnTo>
+                <a:lnTo>
+                  <a:pt x="2999599" y="2979995"/>
+                </a:lnTo>
+                <a:lnTo>
+                  <a:pt x="3015222" y="2995516"/>
+                </a:lnTo>
+                <a:lnTo>
+                  <a:pt x="3030845" y="3011036"/>
+                </a:lnTo>
+                <a:lnTo>
+                  <a:pt x="3046468" y="3026557"/>
+                </a:lnTo>
+                <a:lnTo>
+                  <a:pt x="3062091" y="3042078"/>
+                </a:lnTo>
+                <a:lnTo>
+                  <a:pt x="3077714" y="3057599"/>
+                </a:lnTo>
+                <a:lnTo>
+                  <a:pt x="3093337" y="3073120"/>
+                </a:lnTo>
+                <a:lnTo>
+                  <a:pt x="3108960" y="3088641"/>
+                </a:lnTo>
+              </a:path>
+            </a:pathLst>
+          </a:custGeom>
+          <a:noFill/>
+          <a:ln w="38100">
             <a:solidFill>
-              <a:srgbClr val="8EDBD4"/>
+              <a:srgbClr val="7FC8F8"/>
             </a:solidFill>
-            <a:headEnd type="none" w="med" len="med"/>
-            <a:tailEnd type="triangle" w="med" len="med"/>
           </a:ln>
           <a:effectLst/>
         </p:spPr>
-      </p:cxnSp>
-      <p:sp>
-        <p:nvSpPr>
-          <p:cNvPr id="8" name="text 6" descr="sci-ppt:obj-006"/>
+        <p:txBody>
+          <a:bodyPr rtlCol="0" anchor="ctr"/>
+          <a:lstStyle/>
+          <a:p>
+            <a:pPr algn="ctr"/>
+          </a:p>
+        </p:txBody>
+      </p:sp>
+      <p:sp>
+        <p:nvSpPr>
+          <p:cNvPr id="30" name="A-E15 ellipse 28" descr="sci-ppt:o028"/>
+          <p:cNvSpPr/>
+          <p:nvPr/>
+        </p:nvSpPr>
+        <p:spPr>
+          <a:xfrm>
+            <a:off x="1618488" y="2263647"/>
+            <a:ext cx="146304" cy="146304"/>
+          </a:xfrm>
+          <a:prstGeom prst="ellipse">
+            <a:avLst/>
+          </a:prstGeom>
+          <a:solidFill>
+            <a:srgbClr val="F2B880"/>
+          </a:solidFill>
+          <a:ln w="12700">
+            <a:solidFill>
+              <a:srgbClr val="F2B880"/>
+            </a:solidFill>
+          </a:ln>
+          <a:effectLst/>
+        </p:spPr>
+        <p:txBody>
+          <a:bodyPr rtlCol="0" anchor="ctr"/>
+          <a:lstStyle/>
+          <a:p>
+            <a:pPr algn="ctr"/>
+          </a:p>
+        </p:txBody>
+      </p:sp>
+      <p:sp>
+        <p:nvSpPr>
+          <p:cNvPr id="31" name="A-E15 text 29" descr="sci-ppt:o029"/>
           <p:cNvSpPr txBox="1"/>
           <p:nvPr/>
         </p:nvSpPr>
         <p:spPr>
           <a:xfrm>
-            <a:off x="2304288" y="2139696"/>
-            <a:ext cx="822960" cy="310896"/>
+            <a:off x="1828800" y="2247290"/>
+            <a:ext cx="2194560" cy="216153"/>
           </a:xfrm>
           <a:prstGeom prst="rect">
             <a:avLst/>
@@ -3304,7 +4558,7 @@
           <a:effectLst/>
         </p:spPr>
         <p:txBody>
-          <a:bodyPr wrap="none" lIns="0" rIns="0" tIns="0" bIns="0" anchor="ctr">
+          <a:bodyPr wrap="none" lIns="18288" rIns="18288" tIns="18288" bIns="18288" anchor="t">
             <a:spAutoFit/>
           </a:bodyPr>
           <a:lstStyle/>
@@ -3315,113 +4569,637 @@
               </a:spcAft>
             </a:pPr>
             <a:r>
-              <a:rPr sz="1296" b="0" i="0">
+              <a:rPr sz="1100" b="0" i="0">
+                <a:solidFill>
+                  <a:srgbClr val="F2B880"/>
+                </a:solidFill>
+                <a:latin typeface="Arial"/>
+              </a:rPr>
+              <a:t>+13.33 kPa at Ṙ = −10 m/s</a:t>
+            </a:r>
+          </a:p>
+        </p:txBody>
+      </p:sp>
+      <p:cxnSp>
+        <p:nvCxnSpPr>
+          <p:cNvPr id="32" name="A-E15 line 30" descr="sci-ppt:o030"/>
+          <p:cNvCxnSpPr/>
+          <p:nvPr/>
+        </p:nvCxnSpPr>
+        <p:spPr>
+          <a:xfrm>
+            <a:off x="5303520" y="4846320"/>
+            <a:ext cx="3108960" cy="0"/>
+          </a:xfrm>
+          <a:prstGeom prst="line">
+            <a:avLst/>
+          </a:prstGeom>
+          <a:ln w="19050">
+            <a:solidFill>
+              <a:srgbClr val="B4C7D2"/>
+            </a:solidFill>
+          </a:ln>
+          <a:effectLst/>
+        </p:spPr>
+      </p:cxnSp>
+      <p:cxnSp>
+        <p:nvCxnSpPr>
+          <p:cNvPr id="33" name="A-E15 line 31" descr="sci-ppt:o031"/>
+          <p:cNvCxnSpPr/>
+          <p:nvPr/>
+        </p:nvCxnSpPr>
+        <p:spPr>
+          <a:xfrm>
+            <a:off x="5303520" y="1371600"/>
+            <a:ext cx="0" cy="3474720"/>
+          </a:xfrm>
+          <a:prstGeom prst="line">
+            <a:avLst/>
+          </a:prstGeom>
+          <a:ln w="19050">
+            <a:solidFill>
+              <a:srgbClr val="B4C7D2"/>
+            </a:solidFill>
+          </a:ln>
+          <a:effectLst/>
+        </p:spPr>
+      </p:cxnSp>
+      <p:cxnSp>
+        <p:nvCxnSpPr>
+          <p:cNvPr id="34" name="A-E15 line 32" descr="sci-ppt:o032"/>
+          <p:cNvCxnSpPr/>
+          <p:nvPr/>
+        </p:nvCxnSpPr>
+        <p:spPr>
+          <a:xfrm>
+            <a:off x="5303520" y="4846320"/>
+            <a:ext cx="0" cy="64008"/>
+          </a:xfrm>
+          <a:prstGeom prst="line">
+            <a:avLst/>
+          </a:prstGeom>
+          <a:ln w="12700">
+            <a:solidFill>
+              <a:srgbClr val="B4C7D2"/>
+            </a:solidFill>
+          </a:ln>
+          <a:effectLst/>
+        </p:spPr>
+      </p:cxnSp>
+      <p:cxnSp>
+        <p:nvCxnSpPr>
+          <p:cNvPr id="35" name="A-E15 line 33" descr="sci-ppt:o033"/>
+          <p:cNvCxnSpPr/>
+          <p:nvPr/>
+        </p:nvCxnSpPr>
+        <p:spPr>
+          <a:xfrm>
+            <a:off x="5303520" y="1371600"/>
+            <a:ext cx="0" cy="3474720"/>
+          </a:xfrm>
+          <a:prstGeom prst="line">
+            <a:avLst/>
+          </a:prstGeom>
+          <a:ln w="7620">
+            <a:solidFill>
+              <a:srgbClr val="2E4756"/>
+            </a:solidFill>
+          </a:ln>
+          <a:effectLst/>
+        </p:spPr>
+      </p:cxnSp>
+      <p:sp>
+        <p:nvSpPr>
+          <p:cNvPr id="36" name="A-E15 text 34" descr="sci-ppt:o034"/>
+          <p:cNvSpPr txBox="1"/>
+          <p:nvPr/>
+        </p:nvSpPr>
+        <p:spPr>
+          <a:xfrm>
+            <a:off x="4846320" y="4928616"/>
+            <a:ext cx="914400" cy="208407"/>
+          </a:xfrm>
+          <a:prstGeom prst="rect">
+            <a:avLst/>
+          </a:prstGeom>
+          <a:noFill/>
+          <a:effectLst/>
+        </p:spPr>
+        <p:txBody>
+          <a:bodyPr wrap="none" lIns="18288" rIns="18288" tIns="18288" bIns="18288" anchor="t">
+            <a:spAutoFit/>
+          </a:bodyPr>
+          <a:lstStyle/>
+          <a:p>
+            <a:pPr algn="ctr">
+              <a:spcAft>
+                <a:spcPts val="0"/>
+              </a:spcAft>
+            </a:pPr>
+            <a:r>
+              <a:rPr sz="1050" b="0" i="0">
+                <a:solidFill>
+                  <a:srgbClr val="B4C7D2"/>
+                </a:solidFill>
+                <a:latin typeface="Arial"/>
+              </a:rPr>
+              <a:t>-20</a:t>
+            </a:r>
+          </a:p>
+        </p:txBody>
+      </p:sp>
+      <p:cxnSp>
+        <p:nvCxnSpPr>
+          <p:cNvPr id="37" name="A-E15 line 35" descr="sci-ppt:o035"/>
+          <p:cNvCxnSpPr/>
+          <p:nvPr/>
+        </p:nvCxnSpPr>
+        <p:spPr>
+          <a:xfrm>
+            <a:off x="6858000" y="4846320"/>
+            <a:ext cx="0" cy="64008"/>
+          </a:xfrm>
+          <a:prstGeom prst="line">
+            <a:avLst/>
+          </a:prstGeom>
+          <a:ln w="12700">
+            <a:solidFill>
+              <a:srgbClr val="B4C7D2"/>
+            </a:solidFill>
+          </a:ln>
+          <a:effectLst/>
+        </p:spPr>
+      </p:cxnSp>
+      <p:cxnSp>
+        <p:nvCxnSpPr>
+          <p:cNvPr id="38" name="A-E15 line 36" descr="sci-ppt:o036"/>
+          <p:cNvCxnSpPr/>
+          <p:nvPr/>
+        </p:nvCxnSpPr>
+        <p:spPr>
+          <a:xfrm>
+            <a:off x="6858000" y="1371600"/>
+            <a:ext cx="0" cy="3474720"/>
+          </a:xfrm>
+          <a:prstGeom prst="line">
+            <a:avLst/>
+          </a:prstGeom>
+          <a:ln w="7620">
+            <a:solidFill>
+              <a:srgbClr val="2E4756"/>
+            </a:solidFill>
+          </a:ln>
+          <a:effectLst/>
+        </p:spPr>
+      </p:cxnSp>
+      <p:sp>
+        <p:nvSpPr>
+          <p:cNvPr id="39" name="A-E15 text 37" descr="sci-ppt:o037"/>
+          <p:cNvSpPr txBox="1"/>
+          <p:nvPr/>
+        </p:nvSpPr>
+        <p:spPr>
+          <a:xfrm>
+            <a:off x="6400800" y="4928616"/>
+            <a:ext cx="914400" cy="208407"/>
+          </a:xfrm>
+          <a:prstGeom prst="rect">
+            <a:avLst/>
+          </a:prstGeom>
+          <a:noFill/>
+          <a:effectLst/>
+        </p:spPr>
+        <p:txBody>
+          <a:bodyPr wrap="none" lIns="18288" rIns="18288" tIns="18288" bIns="18288" anchor="t">
+            <a:spAutoFit/>
+          </a:bodyPr>
+          <a:lstStyle/>
+          <a:p>
+            <a:pPr algn="ctr">
+              <a:spcAft>
+                <a:spcPts val="0"/>
+              </a:spcAft>
+            </a:pPr>
+            <a:r>
+              <a:rPr sz="1050" b="0" i="0">
+                <a:solidFill>
+                  <a:srgbClr val="B4C7D2"/>
+                </a:solidFill>
+                <a:latin typeface="Arial"/>
+              </a:rPr>
+              <a:t>0</a:t>
+            </a:r>
+          </a:p>
+        </p:txBody>
+      </p:sp>
+      <p:cxnSp>
+        <p:nvCxnSpPr>
+          <p:cNvPr id="40" name="A-E15 line 38" descr="sci-ppt:o038"/>
+          <p:cNvCxnSpPr/>
+          <p:nvPr/>
+        </p:nvCxnSpPr>
+        <p:spPr>
+          <a:xfrm>
+            <a:off x="8412480" y="4846320"/>
+            <a:ext cx="0" cy="64008"/>
+          </a:xfrm>
+          <a:prstGeom prst="line">
+            <a:avLst/>
+          </a:prstGeom>
+          <a:ln w="12700">
+            <a:solidFill>
+              <a:srgbClr val="B4C7D2"/>
+            </a:solidFill>
+          </a:ln>
+          <a:effectLst/>
+        </p:spPr>
+      </p:cxnSp>
+      <p:cxnSp>
+        <p:nvCxnSpPr>
+          <p:cNvPr id="41" name="A-E15 line 39" descr="sci-ppt:o039"/>
+          <p:cNvCxnSpPr/>
+          <p:nvPr/>
+        </p:nvCxnSpPr>
+        <p:spPr>
+          <a:xfrm>
+            <a:off x="8412480" y="1371600"/>
+            <a:ext cx="0" cy="3474720"/>
+          </a:xfrm>
+          <a:prstGeom prst="line">
+            <a:avLst/>
+          </a:prstGeom>
+          <a:ln w="7620">
+            <a:solidFill>
+              <a:srgbClr val="2E4756"/>
+            </a:solidFill>
+          </a:ln>
+          <a:effectLst/>
+        </p:spPr>
+      </p:cxnSp>
+      <p:sp>
+        <p:nvSpPr>
+          <p:cNvPr id="42" name="A-E15 text 40" descr="sci-ppt:o040"/>
+          <p:cNvSpPr txBox="1"/>
+          <p:nvPr/>
+        </p:nvSpPr>
+        <p:spPr>
+          <a:xfrm>
+            <a:off x="7955279" y="4928616"/>
+            <a:ext cx="914400" cy="208407"/>
+          </a:xfrm>
+          <a:prstGeom prst="rect">
+            <a:avLst/>
+          </a:prstGeom>
+          <a:noFill/>
+          <a:effectLst/>
+        </p:spPr>
+        <p:txBody>
+          <a:bodyPr wrap="none" lIns="18288" rIns="18288" tIns="18288" bIns="18288" anchor="t">
+            <a:spAutoFit/>
+          </a:bodyPr>
+          <a:lstStyle/>
+          <a:p>
+            <a:pPr algn="ctr">
+              <a:spcAft>
+                <a:spcPts val="0"/>
+              </a:spcAft>
+            </a:pPr>
+            <a:r>
+              <a:rPr sz="1050" b="0" i="0">
+                <a:solidFill>
+                  <a:srgbClr val="B4C7D2"/>
+                </a:solidFill>
+                <a:latin typeface="Arial"/>
+              </a:rPr>
+              <a:t>20</a:t>
+            </a:r>
+          </a:p>
+        </p:txBody>
+      </p:sp>
+      <p:cxnSp>
+        <p:nvCxnSpPr>
+          <p:cNvPr id="43" name="A-E15 line 41" descr="sci-ppt:o041"/>
+          <p:cNvCxnSpPr/>
+          <p:nvPr/>
+        </p:nvCxnSpPr>
+        <p:spPr>
+          <a:xfrm>
+            <a:off x="5239512" y="4846320"/>
+            <a:ext cx="64008" cy="0"/>
+          </a:xfrm>
+          <a:prstGeom prst="line">
+            <a:avLst/>
+          </a:prstGeom>
+          <a:ln w="12700">
+            <a:solidFill>
+              <a:srgbClr val="B4C7D2"/>
+            </a:solidFill>
+          </a:ln>
+          <a:effectLst/>
+        </p:spPr>
+      </p:cxnSp>
+      <p:cxnSp>
+        <p:nvCxnSpPr>
+          <p:cNvPr id="44" name="A-E15 line 42" descr="sci-ppt:o042"/>
+          <p:cNvCxnSpPr/>
+          <p:nvPr/>
+        </p:nvCxnSpPr>
+        <p:spPr>
+          <a:xfrm>
+            <a:off x="5239512" y="3688080"/>
+            <a:ext cx="64008" cy="0"/>
+          </a:xfrm>
+          <a:prstGeom prst="line">
+            <a:avLst/>
+          </a:prstGeom>
+          <a:ln w="12700">
+            <a:solidFill>
+              <a:srgbClr val="B4C7D2"/>
+            </a:solidFill>
+          </a:ln>
+          <a:effectLst/>
+        </p:spPr>
+      </p:cxnSp>
+      <p:cxnSp>
+        <p:nvCxnSpPr>
+          <p:cNvPr id="45" name="A-E15 line 43" descr="sci-ppt:o043"/>
+          <p:cNvCxnSpPr/>
+          <p:nvPr/>
+        </p:nvCxnSpPr>
+        <p:spPr>
+          <a:xfrm>
+            <a:off x="5303520" y="3688080"/>
+            <a:ext cx="3108960" cy="0"/>
+          </a:xfrm>
+          <a:prstGeom prst="line">
+            <a:avLst/>
+          </a:prstGeom>
+          <a:ln w="7620">
+            <a:solidFill>
+              <a:srgbClr val="2E4756"/>
+            </a:solidFill>
+          </a:ln>
+          <a:effectLst/>
+        </p:spPr>
+      </p:cxnSp>
+      <p:sp>
+        <p:nvSpPr>
+          <p:cNvPr id="46" name="A-E15 text 44" descr="sci-ppt:o044"/>
+          <p:cNvSpPr txBox="1"/>
+          <p:nvPr/>
+        </p:nvSpPr>
+        <p:spPr>
+          <a:xfrm>
+            <a:off x="4434840" y="3605784"/>
+            <a:ext cx="777240" cy="208407"/>
+          </a:xfrm>
+          <a:prstGeom prst="rect">
+            <a:avLst/>
+          </a:prstGeom>
+          <a:noFill/>
+          <a:effectLst/>
+        </p:spPr>
+        <p:txBody>
+          <a:bodyPr wrap="none" lIns="18288" rIns="18288" tIns="18288" bIns="18288" anchor="t">
+            <a:spAutoFit/>
+          </a:bodyPr>
+          <a:lstStyle/>
+          <a:p>
+            <a:pPr algn="r">
+              <a:spcAft>
+                <a:spcPts val="0"/>
+              </a:spcAft>
+            </a:pPr>
+            <a:r>
+              <a:rPr sz="1050" b="0" i="0">
+                <a:solidFill>
+                  <a:srgbClr val="B4C7D2"/>
+                </a:solidFill>
+                <a:latin typeface="Arial"/>
+              </a:rPr>
+              <a:t>2</a:t>
+            </a:r>
+          </a:p>
+        </p:txBody>
+      </p:sp>
+      <p:cxnSp>
+        <p:nvCxnSpPr>
+          <p:cNvPr id="47" name="A-E15 line 45" descr="sci-ppt:o045"/>
+          <p:cNvCxnSpPr/>
+          <p:nvPr/>
+        </p:nvCxnSpPr>
+        <p:spPr>
+          <a:xfrm>
+            <a:off x="5239512" y="2529840"/>
+            <a:ext cx="64008" cy="0"/>
+          </a:xfrm>
+          <a:prstGeom prst="line">
+            <a:avLst/>
+          </a:prstGeom>
+          <a:ln w="12700">
+            <a:solidFill>
+              <a:srgbClr val="B4C7D2"/>
+            </a:solidFill>
+          </a:ln>
+          <a:effectLst/>
+        </p:spPr>
+      </p:cxnSp>
+      <p:cxnSp>
+        <p:nvCxnSpPr>
+          <p:cNvPr id="48" name="A-E15 line 46" descr="sci-ppt:o046"/>
+          <p:cNvCxnSpPr/>
+          <p:nvPr/>
+        </p:nvCxnSpPr>
+        <p:spPr>
+          <a:xfrm>
+            <a:off x="5303520" y="2529840"/>
+            <a:ext cx="3108960" cy="0"/>
+          </a:xfrm>
+          <a:prstGeom prst="line">
+            <a:avLst/>
+          </a:prstGeom>
+          <a:ln w="7620">
+            <a:solidFill>
+              <a:srgbClr val="2E4756"/>
+            </a:solidFill>
+          </a:ln>
+          <a:effectLst/>
+        </p:spPr>
+      </p:cxnSp>
+      <p:sp>
+        <p:nvSpPr>
+          <p:cNvPr id="49" name="A-E15 text 47" descr="sci-ppt:o047"/>
+          <p:cNvSpPr txBox="1"/>
+          <p:nvPr/>
+        </p:nvSpPr>
+        <p:spPr>
+          <a:xfrm>
+            <a:off x="4434840" y="2447544"/>
+            <a:ext cx="777240" cy="208407"/>
+          </a:xfrm>
+          <a:prstGeom prst="rect">
+            <a:avLst/>
+          </a:prstGeom>
+          <a:noFill/>
+          <a:effectLst/>
+        </p:spPr>
+        <p:txBody>
+          <a:bodyPr wrap="none" lIns="18288" rIns="18288" tIns="18288" bIns="18288" anchor="t">
+            <a:spAutoFit/>
+          </a:bodyPr>
+          <a:lstStyle/>
+          <a:p>
+            <a:pPr algn="r">
+              <a:spcAft>
+                <a:spcPts val="0"/>
+              </a:spcAft>
+            </a:pPr>
+            <a:r>
+              <a:rPr sz="1050" b="0" i="0">
+                <a:solidFill>
+                  <a:srgbClr val="B4C7D2"/>
+                </a:solidFill>
+                <a:latin typeface="Arial"/>
+              </a:rPr>
+              <a:t>4</a:t>
+            </a:r>
+          </a:p>
+        </p:txBody>
+      </p:sp>
+      <p:cxnSp>
+        <p:nvCxnSpPr>
+          <p:cNvPr id="50" name="A-E15 line 48" descr="sci-ppt:o048"/>
+          <p:cNvCxnSpPr/>
+          <p:nvPr/>
+        </p:nvCxnSpPr>
+        <p:spPr>
+          <a:xfrm>
+            <a:off x="5239512" y="1371600"/>
+            <a:ext cx="64008" cy="0"/>
+          </a:xfrm>
+          <a:prstGeom prst="line">
+            <a:avLst/>
+          </a:prstGeom>
+          <a:ln w="12700">
+            <a:solidFill>
+              <a:srgbClr val="B4C7D2"/>
+            </a:solidFill>
+          </a:ln>
+          <a:effectLst/>
+        </p:spPr>
+      </p:cxnSp>
+      <p:cxnSp>
+        <p:nvCxnSpPr>
+          <p:cNvPr id="51" name="A-E15 line 49" descr="sci-ppt:o049"/>
+          <p:cNvCxnSpPr/>
+          <p:nvPr/>
+        </p:nvCxnSpPr>
+        <p:spPr>
+          <a:xfrm>
+            <a:off x="5303520" y="1371600"/>
+            <a:ext cx="3108960" cy="0"/>
+          </a:xfrm>
+          <a:prstGeom prst="line">
+            <a:avLst/>
+          </a:prstGeom>
+          <a:ln w="7620">
+            <a:solidFill>
+              <a:srgbClr val="2E4756"/>
+            </a:solidFill>
+          </a:ln>
+          <a:effectLst/>
+        </p:spPr>
+      </p:cxnSp>
+      <p:sp>
+        <p:nvSpPr>
+          <p:cNvPr id="52" name="A-E15 text 50" descr="sci-ppt:o050"/>
+          <p:cNvSpPr txBox="1"/>
+          <p:nvPr/>
+        </p:nvSpPr>
+        <p:spPr>
+          <a:xfrm>
+            <a:off x="4434840" y="1289304"/>
+            <a:ext cx="777240" cy="208407"/>
+          </a:xfrm>
+          <a:prstGeom prst="rect">
+            <a:avLst/>
+          </a:prstGeom>
+          <a:noFill/>
+          <a:effectLst/>
+        </p:spPr>
+        <p:txBody>
+          <a:bodyPr wrap="none" lIns="18288" rIns="18288" tIns="18288" bIns="18288" anchor="t">
+            <a:spAutoFit/>
+          </a:bodyPr>
+          <a:lstStyle/>
+          <a:p>
+            <a:pPr algn="r">
+              <a:spcAft>
+                <a:spcPts val="0"/>
+              </a:spcAft>
+            </a:pPr>
+            <a:r>
+              <a:rPr sz="1050" b="0" i="0">
+                <a:solidFill>
+                  <a:srgbClr val="B4C7D2"/>
+                </a:solidFill>
+                <a:latin typeface="Arial"/>
+              </a:rPr>
+              <a:t>6</a:t>
+            </a:r>
+          </a:p>
+        </p:txBody>
+      </p:sp>
+      <p:sp>
+        <p:nvSpPr>
+          <p:cNvPr id="53" name="A-E15 text 51" descr="sci-ppt:o051"/>
+          <p:cNvSpPr txBox="1"/>
+          <p:nvPr/>
+        </p:nvSpPr>
+        <p:spPr>
+          <a:xfrm>
+            <a:off x="5303520" y="5129783"/>
+            <a:ext cx="3108960" cy="231648"/>
+          </a:xfrm>
+          <a:prstGeom prst="rect">
+            <a:avLst/>
+          </a:prstGeom>
+          <a:noFill/>
+          <a:effectLst/>
+        </p:spPr>
+        <p:txBody>
+          <a:bodyPr wrap="none" lIns="18288" rIns="18288" tIns="18288" bIns="18288" anchor="t">
+            <a:spAutoFit/>
+          </a:bodyPr>
+          <a:lstStyle/>
+          <a:p>
+            <a:pPr algn="ctr">
+              <a:spcAft>
+                <a:spcPts val="0"/>
+              </a:spcAft>
+            </a:pPr>
+            <a:r>
+              <a:rPr sz="1200" b="0" i="0">
                 <a:solidFill>
                   <a:srgbClr val="E7F0F3"/>
                 </a:solidFill>
                 <a:latin typeface="Arial"/>
               </a:rPr>
-              <a:t>r₀</a:t>
-            </a:r>
-          </a:p>
-        </p:txBody>
-      </p:sp>
-      <p:sp>
-        <p:nvSpPr>
-          <p:cNvPr id="9" name="ellipse 7" descr="sci-ppt:obj-007"/>
-          <p:cNvSpPr/>
-          <p:nvPr/>
-        </p:nvSpPr>
-        <p:spPr>
-          <a:xfrm>
-            <a:off x="4682139" y="750219"/>
-            <a:ext cx="1791401" cy="1791401"/>
-          </a:xfrm>
-          <a:prstGeom prst="ellipse">
-            <a:avLst/>
-          </a:prstGeom>
-          <a:noFill/>
-          <a:ln w="17780">
-            <a:solidFill>
-              <a:srgbClr val="B4C7D2"/>
-            </a:solidFill>
-          </a:ln>
-          <a:effectLst/>
-        </p:spPr>
-        <p:txBody>
-          <a:bodyPr rtlCol="0" anchor="ctr"/>
-          <a:lstStyle/>
-          <a:p>
-            <a:pPr algn="ctr"/>
-          </a:p>
-        </p:txBody>
-      </p:sp>
-      <p:sp>
-        <p:nvSpPr>
-          <p:cNvPr id="10" name="ellipse 8" descr="sci-ppt:obj-008"/>
-          <p:cNvSpPr/>
-          <p:nvPr/>
-        </p:nvSpPr>
-        <p:spPr>
-          <a:xfrm>
-            <a:off x="4864608" y="932688"/>
-            <a:ext cx="1426464" cy="1426464"/>
-          </a:xfrm>
-          <a:prstGeom prst="ellipse">
-            <a:avLst/>
-          </a:prstGeom>
-          <a:solidFill>
-            <a:srgbClr val="213E4B"/>
-          </a:solidFill>
-          <a:ln w="17780">
-            <a:solidFill>
-              <a:srgbClr val="B4C7D2"/>
-            </a:solidFill>
-          </a:ln>
-          <a:effectLst/>
-        </p:spPr>
-        <p:txBody>
-          <a:bodyPr rtlCol="0" anchor="ctr"/>
-          <a:lstStyle/>
-          <a:p>
-            <a:pPr algn="ctr"/>
-          </a:p>
-        </p:txBody>
-      </p:sp>
-      <p:cxnSp>
-        <p:nvCxnSpPr>
-          <p:cNvPr id="11" name="arrow 9" descr="sci-ppt:obj-009"/>
-          <p:cNvCxnSpPr/>
-          <p:nvPr/>
-        </p:nvCxnSpPr>
-        <p:spPr>
-          <a:xfrm>
-            <a:off x="5577840" y="1645920"/>
-            <a:ext cx="713232" cy="0"/>
-          </a:xfrm>
-          <a:prstGeom prst="line">
-            <a:avLst/>
-          </a:prstGeom>
-          <a:ln w="21590">
-            <a:solidFill>
-              <a:srgbClr val="8EDBD4"/>
-            </a:solidFill>
-            <a:headEnd type="none" w="med" len="med"/>
-            <a:tailEnd type="triangle" w="med" len="med"/>
-          </a:ln>
-          <a:effectLst/>
-        </p:spPr>
-      </p:cxnSp>
-      <p:sp>
-        <p:nvSpPr>
-          <p:cNvPr id="12" name="text 10" descr="sci-ppt:obj-010"/>
+              <a:t>wall speed Ṙ  (m/s)</a:t>
+            </a:r>
+          </a:p>
+        </p:txBody>
+      </p:sp>
+      <p:sp>
+        <p:nvSpPr>
+          <p:cNvPr id="54" name="A-E15 text 52" descr="sci-ppt:o052"/>
           <p:cNvSpPr txBox="1"/>
           <p:nvPr/>
         </p:nvSpPr>
         <p:spPr>
           <a:xfrm>
-            <a:off x="5952744" y="1271016"/>
-            <a:ext cx="640080" cy="310896"/>
+            <a:off x="4754880" y="1024128"/>
+            <a:ext cx="3108960" cy="231648"/>
           </a:xfrm>
           <a:prstGeom prst="rect">
             <a:avLst/>
@@ -3430,7 +5208,7 @@
           <a:effectLst/>
         </p:spPr>
         <p:txBody>
-          <a:bodyPr wrap="none" lIns="0" rIns="0" tIns="0" bIns="0" anchor="ctr">
+          <a:bodyPr wrap="none" lIns="18288" rIns="18288" tIns="18288" bIns="18288" anchor="t">
             <a:spAutoFit/>
           </a:bodyPr>
           <a:lstStyle/>
@@ -3441,51 +5219,691 @@
               </a:spcAft>
             </a:pPr>
             <a:r>
-              <a:rPr sz="1296" b="0" i="0">
+              <a:rPr sz="1200" b="0" i="0">
                 <a:solidFill>
                   <a:srgbClr val="E7F0F3"/>
                 </a:solidFill>
                 <a:latin typeface="Arial"/>
               </a:rPr>
-              <a:t>R</a:t>
-            </a:r>
-          </a:p>
-        </p:txBody>
-      </p:sp>
-      <p:cxnSp>
-        <p:nvCxnSpPr>
-          <p:cNvPr id="13" name="arrow 11" descr="sci-ppt:obj-011"/>
-          <p:cNvCxnSpPr/>
+              <a:t>P_dis  (mW)</a:t>
+            </a:r>
+          </a:p>
+        </p:txBody>
+      </p:sp>
+      <p:sp>
+        <p:nvSpPr>
+          <p:cNvPr id="55" name="A-E15 polygon 53" descr="sci-ppt:o053"/>
+          <p:cNvSpPr/>
           <p:nvPr/>
-        </p:nvCxnSpPr>
-        <p:spPr>
-          <a:xfrm>
-            <a:off x="5577840" y="1645920"/>
-            <a:ext cx="633355" cy="633355"/>
-          </a:xfrm>
-          <a:prstGeom prst="line">
-            <a:avLst/>
-          </a:prstGeom>
-          <a:ln w="21590">
+        </p:nvSpPr>
+        <p:spPr>
+          <a:xfrm>
+            <a:off x="5319142" y="1423012"/>
+            <a:ext cx="3077715" cy="3423219"/>
+          </a:xfrm>
+          <a:custGeom>
+            <a:avLst/>
+            <a:gdLst/>
+            <a:ahLst/>
+            <a:cxnLst/>
+            <a:rect l="l" t="t" r="r" b="b"/>
+            <a:pathLst>
+              <a:path w="3077715" h="3423219">
+                <a:moveTo>
+                  <a:pt x="0" y="0"/>
+                </a:moveTo>
+                <a:lnTo>
+                  <a:pt x="15623" y="69156"/>
+                </a:lnTo>
+                <a:lnTo>
+                  <a:pt x="31246" y="137606"/>
+                </a:lnTo>
+                <a:lnTo>
+                  <a:pt x="46869" y="205350"/>
+                </a:lnTo>
+                <a:lnTo>
+                  <a:pt x="62492" y="272389"/>
+                </a:lnTo>
+                <a:lnTo>
+                  <a:pt x="78115" y="338723"/>
+                </a:lnTo>
+                <a:lnTo>
+                  <a:pt x="93738" y="404350"/>
+                </a:lnTo>
+                <a:lnTo>
+                  <a:pt x="109361" y="469272"/>
+                </a:lnTo>
+                <a:lnTo>
+                  <a:pt x="124984" y="533488"/>
+                </a:lnTo>
+                <a:lnTo>
+                  <a:pt x="140607" y="596999"/>
+                </a:lnTo>
+                <a:lnTo>
+                  <a:pt x="156230" y="659804"/>
+                </a:lnTo>
+                <a:lnTo>
+                  <a:pt x="171852" y="721903"/>
+                </a:lnTo>
+                <a:lnTo>
+                  <a:pt x="187475" y="783297"/>
+                </a:lnTo>
+                <a:lnTo>
+                  <a:pt x="203098" y="843984"/>
+                </a:lnTo>
+                <a:lnTo>
+                  <a:pt x="218721" y="903967"/>
+                </a:lnTo>
+                <a:lnTo>
+                  <a:pt x="234344" y="963243"/>
+                </a:lnTo>
+                <a:lnTo>
+                  <a:pt x="249967" y="1021814"/>
+                </a:lnTo>
+                <a:lnTo>
+                  <a:pt x="265590" y="1079679"/>
+                </a:lnTo>
+                <a:lnTo>
+                  <a:pt x="281213" y="1136839"/>
+                </a:lnTo>
+                <a:lnTo>
+                  <a:pt x="296836" y="1193293"/>
+                </a:lnTo>
+                <a:lnTo>
+                  <a:pt x="312459" y="1249041"/>
+                </a:lnTo>
+                <a:lnTo>
+                  <a:pt x="328082" y="1304083"/>
+                </a:lnTo>
+                <a:lnTo>
+                  <a:pt x="343705" y="1358420"/>
+                </a:lnTo>
+                <a:lnTo>
+                  <a:pt x="359327" y="1412051"/>
+                </a:lnTo>
+                <a:lnTo>
+                  <a:pt x="374950" y="1464977"/>
+                </a:lnTo>
+                <a:lnTo>
+                  <a:pt x="390573" y="1517197"/>
+                </a:lnTo>
+                <a:lnTo>
+                  <a:pt x="406196" y="1568711"/>
+                </a:lnTo>
+                <a:lnTo>
+                  <a:pt x="421819" y="1619519"/>
+                </a:lnTo>
+                <a:lnTo>
+                  <a:pt x="437442" y="1669622"/>
+                </a:lnTo>
+                <a:lnTo>
+                  <a:pt x="453065" y="1719019"/>
+                </a:lnTo>
+                <a:lnTo>
+                  <a:pt x="468688" y="1767710"/>
+                </a:lnTo>
+                <a:lnTo>
+                  <a:pt x="484311" y="1815696"/>
+                </a:lnTo>
+                <a:lnTo>
+                  <a:pt x="499934" y="1862976"/>
+                </a:lnTo>
+                <a:lnTo>
+                  <a:pt x="515557" y="1909551"/>
+                </a:lnTo>
+                <a:lnTo>
+                  <a:pt x="531180" y="1955419"/>
+                </a:lnTo>
+                <a:lnTo>
+                  <a:pt x="546802" y="2000583"/>
+                </a:lnTo>
+                <a:lnTo>
+                  <a:pt x="562425" y="2045040"/>
+                </a:lnTo>
+                <a:lnTo>
+                  <a:pt x="578048" y="2088792"/>
+                </a:lnTo>
+                <a:lnTo>
+                  <a:pt x="593671" y="2131838"/>
+                </a:lnTo>
+                <a:lnTo>
+                  <a:pt x="609294" y="2174178"/>
+                </a:lnTo>
+                <a:lnTo>
+                  <a:pt x="624917" y="2215813"/>
+                </a:lnTo>
+                <a:lnTo>
+                  <a:pt x="640540" y="2256742"/>
+                </a:lnTo>
+                <a:lnTo>
+                  <a:pt x="656163" y="2296965"/>
+                </a:lnTo>
+                <a:lnTo>
+                  <a:pt x="671786" y="2336483"/>
+                </a:lnTo>
+                <a:lnTo>
+                  <a:pt x="687409" y="2375295"/>
+                </a:lnTo>
+                <a:lnTo>
+                  <a:pt x="703032" y="2413401"/>
+                </a:lnTo>
+                <a:lnTo>
+                  <a:pt x="718654" y="2450802"/>
+                </a:lnTo>
+                <a:lnTo>
+                  <a:pt x="734277" y="2487497"/>
+                </a:lnTo>
+                <a:lnTo>
+                  <a:pt x="749900" y="2523486"/>
+                </a:lnTo>
+                <a:lnTo>
+                  <a:pt x="765523" y="2558770"/>
+                </a:lnTo>
+                <a:lnTo>
+                  <a:pt x="781146" y="2593348"/>
+                </a:lnTo>
+                <a:lnTo>
+                  <a:pt x="796769" y="2627220"/>
+                </a:lnTo>
+                <a:lnTo>
+                  <a:pt x="812392" y="2660387"/>
+                </a:lnTo>
+                <a:lnTo>
+                  <a:pt x="828015" y="2692848"/>
+                </a:lnTo>
+                <a:lnTo>
+                  <a:pt x="843638" y="2724603"/>
+                </a:lnTo>
+                <a:lnTo>
+                  <a:pt x="859261" y="2755653"/>
+                </a:lnTo>
+                <a:lnTo>
+                  <a:pt x="874884" y="2785997"/>
+                </a:lnTo>
+                <a:lnTo>
+                  <a:pt x="890507" y="2815635"/>
+                </a:lnTo>
+                <a:lnTo>
+                  <a:pt x="906129" y="2844567"/>
+                </a:lnTo>
+                <a:lnTo>
+                  <a:pt x="921752" y="2872794"/>
+                </a:lnTo>
+                <a:lnTo>
+                  <a:pt x="937375" y="2900316"/>
+                </a:lnTo>
+                <a:lnTo>
+                  <a:pt x="952998" y="2927131"/>
+                </a:lnTo>
+                <a:lnTo>
+                  <a:pt x="968621" y="2953241"/>
+                </a:lnTo>
+                <a:lnTo>
+                  <a:pt x="984244" y="2978645"/>
+                </a:lnTo>
+                <a:lnTo>
+                  <a:pt x="999867" y="3003344"/>
+                </a:lnTo>
+                <a:lnTo>
+                  <a:pt x="1015490" y="3027337"/>
+                </a:lnTo>
+                <a:lnTo>
+                  <a:pt x="1031113" y="3050624"/>
+                </a:lnTo>
+                <a:lnTo>
+                  <a:pt x="1046736" y="3073205"/>
+                </a:lnTo>
+                <a:lnTo>
+                  <a:pt x="1062359" y="3095081"/>
+                </a:lnTo>
+                <a:lnTo>
+                  <a:pt x="1077982" y="3116252"/>
+                </a:lnTo>
+                <a:lnTo>
+                  <a:pt x="1093604" y="3136716"/>
+                </a:lnTo>
+                <a:lnTo>
+                  <a:pt x="1109227" y="3156475"/>
+                </a:lnTo>
+                <a:lnTo>
+                  <a:pt x="1124850" y="3175528"/>
+                </a:lnTo>
+                <a:lnTo>
+                  <a:pt x="1140473" y="3193876"/>
+                </a:lnTo>
+                <a:lnTo>
+                  <a:pt x="1156096" y="3211517"/>
+                </a:lnTo>
+                <a:lnTo>
+                  <a:pt x="1171719" y="3228454"/>
+                </a:lnTo>
+                <a:lnTo>
+                  <a:pt x="1187342" y="3244684"/>
+                </a:lnTo>
+                <a:lnTo>
+                  <a:pt x="1202965" y="3260209"/>
+                </a:lnTo>
+                <a:lnTo>
+                  <a:pt x="1218588" y="3275028"/>
+                </a:lnTo>
+                <a:lnTo>
+                  <a:pt x="1234211" y="3289141"/>
+                </a:lnTo>
+                <a:lnTo>
+                  <a:pt x="1249834" y="3302549"/>
+                </a:lnTo>
+                <a:lnTo>
+                  <a:pt x="1265456" y="3315251"/>
+                </a:lnTo>
+                <a:lnTo>
+                  <a:pt x="1281079" y="3327248"/>
+                </a:lnTo>
+                <a:lnTo>
+                  <a:pt x="1296702" y="3338539"/>
+                </a:lnTo>
+                <a:lnTo>
+                  <a:pt x="1312325" y="3349124"/>
+                </a:lnTo>
+                <a:lnTo>
+                  <a:pt x="1327948" y="3359003"/>
+                </a:lnTo>
+                <a:lnTo>
+                  <a:pt x="1343571" y="3368177"/>
+                </a:lnTo>
+                <a:lnTo>
+                  <a:pt x="1359194" y="3376645"/>
+                </a:lnTo>
+                <a:lnTo>
+                  <a:pt x="1374817" y="3384407"/>
+                </a:lnTo>
+                <a:lnTo>
+                  <a:pt x="1390440" y="3391464"/>
+                </a:lnTo>
+                <a:lnTo>
+                  <a:pt x="1406063" y="3397815"/>
+                </a:lnTo>
+                <a:lnTo>
+                  <a:pt x="1421686" y="3403460"/>
+                </a:lnTo>
+                <a:lnTo>
+                  <a:pt x="1437309" y="3408400"/>
+                </a:lnTo>
+                <a:lnTo>
+                  <a:pt x="1452931" y="3412634"/>
+                </a:lnTo>
+                <a:lnTo>
+                  <a:pt x="1468554" y="3416163"/>
+                </a:lnTo>
+                <a:lnTo>
+                  <a:pt x="1484177" y="3418985"/>
+                </a:lnTo>
+                <a:lnTo>
+                  <a:pt x="1499800" y="3421102"/>
+                </a:lnTo>
+                <a:lnTo>
+                  <a:pt x="1515423" y="3422514"/>
+                </a:lnTo>
+                <a:lnTo>
+                  <a:pt x="1531046" y="3423219"/>
+                </a:lnTo>
+                <a:lnTo>
+                  <a:pt x="1546669" y="3423219"/>
+                </a:lnTo>
+                <a:lnTo>
+                  <a:pt x="1562292" y="3422514"/>
+                </a:lnTo>
+                <a:lnTo>
+                  <a:pt x="1577915" y="3421102"/>
+                </a:lnTo>
+                <a:lnTo>
+                  <a:pt x="1593538" y="3418985"/>
+                </a:lnTo>
+                <a:lnTo>
+                  <a:pt x="1609161" y="3416163"/>
+                </a:lnTo>
+                <a:lnTo>
+                  <a:pt x="1624784" y="3412634"/>
+                </a:lnTo>
+                <a:lnTo>
+                  <a:pt x="1640406" y="3408400"/>
+                </a:lnTo>
+                <a:lnTo>
+                  <a:pt x="1656029" y="3403460"/>
+                </a:lnTo>
+                <a:lnTo>
+                  <a:pt x="1671652" y="3397815"/>
+                </a:lnTo>
+                <a:lnTo>
+                  <a:pt x="1687275" y="3391464"/>
+                </a:lnTo>
+                <a:lnTo>
+                  <a:pt x="1702898" y="3384407"/>
+                </a:lnTo>
+                <a:lnTo>
+                  <a:pt x="1718521" y="3376645"/>
+                </a:lnTo>
+                <a:lnTo>
+                  <a:pt x="1734144" y="3368177"/>
+                </a:lnTo>
+                <a:lnTo>
+                  <a:pt x="1749767" y="3359003"/>
+                </a:lnTo>
+                <a:lnTo>
+                  <a:pt x="1765390" y="3349124"/>
+                </a:lnTo>
+                <a:lnTo>
+                  <a:pt x="1781013" y="3338539"/>
+                </a:lnTo>
+                <a:lnTo>
+                  <a:pt x="1796636" y="3327248"/>
+                </a:lnTo>
+                <a:lnTo>
+                  <a:pt x="1812259" y="3315251"/>
+                </a:lnTo>
+                <a:lnTo>
+                  <a:pt x="1827881" y="3302549"/>
+                </a:lnTo>
+                <a:lnTo>
+                  <a:pt x="1843504" y="3289141"/>
+                </a:lnTo>
+                <a:lnTo>
+                  <a:pt x="1859127" y="3275028"/>
+                </a:lnTo>
+                <a:lnTo>
+                  <a:pt x="1874750" y="3260209"/>
+                </a:lnTo>
+                <a:lnTo>
+                  <a:pt x="1890373" y="3244684"/>
+                </a:lnTo>
+                <a:lnTo>
+                  <a:pt x="1905996" y="3228454"/>
+                </a:lnTo>
+                <a:lnTo>
+                  <a:pt x="1921619" y="3211517"/>
+                </a:lnTo>
+                <a:lnTo>
+                  <a:pt x="1937242" y="3193876"/>
+                </a:lnTo>
+                <a:lnTo>
+                  <a:pt x="1952865" y="3175528"/>
+                </a:lnTo>
+                <a:lnTo>
+                  <a:pt x="1968488" y="3156475"/>
+                </a:lnTo>
+                <a:lnTo>
+                  <a:pt x="1984111" y="3136716"/>
+                </a:lnTo>
+                <a:lnTo>
+                  <a:pt x="1999733" y="3116252"/>
+                </a:lnTo>
+                <a:lnTo>
+                  <a:pt x="2015356" y="3095081"/>
+                </a:lnTo>
+                <a:lnTo>
+                  <a:pt x="2030979" y="3073205"/>
+                </a:lnTo>
+                <a:lnTo>
+                  <a:pt x="2046602" y="3050624"/>
+                </a:lnTo>
+                <a:lnTo>
+                  <a:pt x="2062225" y="3027337"/>
+                </a:lnTo>
+                <a:lnTo>
+                  <a:pt x="2077848" y="3003344"/>
+                </a:lnTo>
+                <a:lnTo>
+                  <a:pt x="2093471" y="2978645"/>
+                </a:lnTo>
+                <a:lnTo>
+                  <a:pt x="2109094" y="2953241"/>
+                </a:lnTo>
+                <a:lnTo>
+                  <a:pt x="2124717" y="2927131"/>
+                </a:lnTo>
+                <a:lnTo>
+                  <a:pt x="2140340" y="2900316"/>
+                </a:lnTo>
+                <a:lnTo>
+                  <a:pt x="2155963" y="2872794"/>
+                </a:lnTo>
+                <a:lnTo>
+                  <a:pt x="2171586" y="2844567"/>
+                </a:lnTo>
+                <a:lnTo>
+                  <a:pt x="2187208" y="2815635"/>
+                </a:lnTo>
+                <a:lnTo>
+                  <a:pt x="2202831" y="2785997"/>
+                </a:lnTo>
+                <a:lnTo>
+                  <a:pt x="2218454" y="2755653"/>
+                </a:lnTo>
+                <a:lnTo>
+                  <a:pt x="2234077" y="2724603"/>
+                </a:lnTo>
+                <a:lnTo>
+                  <a:pt x="2249700" y="2692848"/>
+                </a:lnTo>
+                <a:lnTo>
+                  <a:pt x="2265323" y="2660387"/>
+                </a:lnTo>
+                <a:lnTo>
+                  <a:pt x="2280946" y="2627220"/>
+                </a:lnTo>
+                <a:lnTo>
+                  <a:pt x="2296569" y="2593348"/>
+                </a:lnTo>
+                <a:lnTo>
+                  <a:pt x="2312192" y="2558770"/>
+                </a:lnTo>
+                <a:lnTo>
+                  <a:pt x="2327815" y="2523486"/>
+                </a:lnTo>
+                <a:lnTo>
+                  <a:pt x="2343438" y="2487497"/>
+                </a:lnTo>
+                <a:lnTo>
+                  <a:pt x="2359061" y="2450802"/>
+                </a:lnTo>
+                <a:lnTo>
+                  <a:pt x="2374683" y="2413401"/>
+                </a:lnTo>
+                <a:lnTo>
+                  <a:pt x="2390306" y="2375295"/>
+                </a:lnTo>
+                <a:lnTo>
+                  <a:pt x="2405929" y="2336483"/>
+                </a:lnTo>
+                <a:lnTo>
+                  <a:pt x="2421552" y="2296965"/>
+                </a:lnTo>
+                <a:lnTo>
+                  <a:pt x="2437175" y="2256742"/>
+                </a:lnTo>
+                <a:lnTo>
+                  <a:pt x="2452798" y="2215813"/>
+                </a:lnTo>
+                <a:lnTo>
+                  <a:pt x="2468421" y="2174178"/>
+                </a:lnTo>
+                <a:lnTo>
+                  <a:pt x="2484044" y="2131838"/>
+                </a:lnTo>
+                <a:lnTo>
+                  <a:pt x="2499667" y="2088792"/>
+                </a:lnTo>
+                <a:lnTo>
+                  <a:pt x="2515290" y="2045040"/>
+                </a:lnTo>
+                <a:lnTo>
+                  <a:pt x="2530913" y="2000583"/>
+                </a:lnTo>
+                <a:lnTo>
+                  <a:pt x="2546535" y="1955419"/>
+                </a:lnTo>
+                <a:lnTo>
+                  <a:pt x="2562158" y="1909551"/>
+                </a:lnTo>
+                <a:lnTo>
+                  <a:pt x="2577781" y="1862976"/>
+                </a:lnTo>
+                <a:lnTo>
+                  <a:pt x="2593404" y="1815696"/>
+                </a:lnTo>
+                <a:lnTo>
+                  <a:pt x="2609027" y="1767710"/>
+                </a:lnTo>
+                <a:lnTo>
+                  <a:pt x="2624650" y="1719019"/>
+                </a:lnTo>
+                <a:lnTo>
+                  <a:pt x="2640273" y="1669622"/>
+                </a:lnTo>
+                <a:lnTo>
+                  <a:pt x="2655896" y="1619519"/>
+                </a:lnTo>
+                <a:lnTo>
+                  <a:pt x="2671519" y="1568711"/>
+                </a:lnTo>
+                <a:lnTo>
+                  <a:pt x="2687142" y="1517197"/>
+                </a:lnTo>
+                <a:lnTo>
+                  <a:pt x="2702765" y="1464977"/>
+                </a:lnTo>
+                <a:lnTo>
+                  <a:pt x="2718388" y="1412051"/>
+                </a:lnTo>
+                <a:lnTo>
+                  <a:pt x="2734010" y="1358420"/>
+                </a:lnTo>
+                <a:lnTo>
+                  <a:pt x="2749633" y="1304083"/>
+                </a:lnTo>
+                <a:lnTo>
+                  <a:pt x="2765256" y="1249041"/>
+                </a:lnTo>
+                <a:lnTo>
+                  <a:pt x="2780879" y="1193293"/>
+                </a:lnTo>
+                <a:lnTo>
+                  <a:pt x="2796502" y="1136839"/>
+                </a:lnTo>
+                <a:lnTo>
+                  <a:pt x="2812125" y="1079679"/>
+                </a:lnTo>
+                <a:lnTo>
+                  <a:pt x="2827748" y="1021814"/>
+                </a:lnTo>
+                <a:lnTo>
+                  <a:pt x="2843371" y="963243"/>
+                </a:lnTo>
+                <a:lnTo>
+                  <a:pt x="2858994" y="903967"/>
+                </a:lnTo>
+                <a:lnTo>
+                  <a:pt x="2874617" y="843984"/>
+                </a:lnTo>
+                <a:lnTo>
+                  <a:pt x="2890240" y="783297"/>
+                </a:lnTo>
+                <a:lnTo>
+                  <a:pt x="2905863" y="721903"/>
+                </a:lnTo>
+                <a:lnTo>
+                  <a:pt x="2921485" y="659804"/>
+                </a:lnTo>
+                <a:lnTo>
+                  <a:pt x="2937108" y="596999"/>
+                </a:lnTo>
+                <a:lnTo>
+                  <a:pt x="2952731" y="533488"/>
+                </a:lnTo>
+                <a:lnTo>
+                  <a:pt x="2968354" y="469272"/>
+                </a:lnTo>
+                <a:lnTo>
+                  <a:pt x="2983977" y="404350"/>
+                </a:lnTo>
+                <a:lnTo>
+                  <a:pt x="2999600" y="338723"/>
+                </a:lnTo>
+                <a:lnTo>
+                  <a:pt x="3015223" y="272389"/>
+                </a:lnTo>
+                <a:lnTo>
+                  <a:pt x="3030846" y="205350"/>
+                </a:lnTo>
+                <a:lnTo>
+                  <a:pt x="3046469" y="137606"/>
+                </a:lnTo>
+                <a:lnTo>
+                  <a:pt x="3062092" y="69156"/>
+                </a:lnTo>
+                <a:lnTo>
+                  <a:pt x="3077715" y="0"/>
+                </a:lnTo>
+              </a:path>
+            </a:pathLst>
+          </a:custGeom>
+          <a:noFill/>
+          <a:ln w="38100">
             <a:solidFill>
-              <a:srgbClr val="8EDBD4"/>
+              <a:srgbClr val="F28BA0"/>
             </a:solidFill>
-            <a:headEnd type="none" w="med" len="med"/>
-            <a:tailEnd type="triangle" w="med" len="med"/>
           </a:ln>
           <a:effectLst/>
         </p:spPr>
-      </p:cxnSp>
-      <p:sp>
-        <p:nvSpPr>
-          <p:cNvPr id="14" name="text 12" descr="sci-ppt:obj-012"/>
+        <p:txBody>
+          <a:bodyPr rtlCol="0" anchor="ctr"/>
+          <a:lstStyle/>
+          <a:p>
+            <a:pPr algn="ctr"/>
+          </a:p>
+        </p:txBody>
+      </p:sp>
+      <p:sp>
+        <p:nvSpPr>
+          <p:cNvPr id="56" name="A-E15 ellipse 54" descr="sci-ppt:o054"/>
+          <p:cNvSpPr/>
+          <p:nvPr/>
+        </p:nvSpPr>
+        <p:spPr>
+          <a:xfrm>
+            <a:off x="6007607" y="3899875"/>
+            <a:ext cx="146304" cy="146304"/>
+          </a:xfrm>
+          <a:prstGeom prst="ellipse">
+            <a:avLst/>
+          </a:prstGeom>
+          <a:solidFill>
+            <a:srgbClr val="F2B880"/>
+          </a:solidFill>
+          <a:ln w="12700">
+            <a:solidFill>
+              <a:srgbClr val="F2B880"/>
+            </a:solidFill>
+          </a:ln>
+          <a:effectLst/>
+        </p:spPr>
+        <p:txBody>
+          <a:bodyPr rtlCol="0" anchor="ctr"/>
+          <a:lstStyle/>
+          <a:p>
+            <a:pPr algn="ctr"/>
+          </a:p>
+        </p:txBody>
+      </p:sp>
+      <p:sp>
+        <p:nvSpPr>
+          <p:cNvPr id="57" name="A-E15 text 55" descr="sci-ppt:o055"/>
           <p:cNvSpPr txBox="1"/>
           <p:nvPr/>
         </p:nvSpPr>
         <p:spPr>
           <a:xfrm>
-            <a:off x="6373368" y="2231136"/>
-            <a:ext cx="640080" cy="310896"/>
+            <a:off x="6263640" y="3515807"/>
+            <a:ext cx="1645920" cy="216153"/>
           </a:xfrm>
           <a:prstGeom prst="rect">
             <a:avLst/>
@@ -3494,7 +5912,7 @@
           <a:effectLst/>
         </p:spPr>
         <p:txBody>
-          <a:bodyPr wrap="none" lIns="0" rIns="0" tIns="0" bIns="0" anchor="ctr">
+          <a:bodyPr wrap="none" lIns="18288" rIns="18288" tIns="18288" bIns="18288" anchor="t">
             <a:spAutoFit/>
           </a:bodyPr>
           <a:lstStyle/>
@@ -3505,51 +5923,139 @@
               </a:spcAft>
             </a:pPr>
             <a:r>
-              <a:rPr sz="1296" b="0" i="0">
+              <a:rPr sz="1100" b="0" i="0">
+                <a:solidFill>
+                  <a:srgbClr val="F2B880"/>
+                </a:solidFill>
+                <a:latin typeface="Arial"/>
+              </a:rPr>
+              <a:t>P_dis = 1.508 mW</a:t>
+            </a:r>
+          </a:p>
+        </p:txBody>
+      </p:sp>
+      <p:sp>
+        <p:nvSpPr>
+          <p:cNvPr id="58" name="A-E15 round_rect 56" descr="sci-ppt:o056"/>
+          <p:cNvSpPr/>
+          <p:nvPr/>
+        </p:nvSpPr>
+        <p:spPr>
+          <a:xfrm>
+            <a:off x="8686800" y="1371600"/>
+            <a:ext cx="3154680" cy="3474720"/>
+          </a:xfrm>
+          <a:prstGeom prst="roundRect">
+            <a:avLst/>
+          </a:prstGeom>
+          <a:solidFill>
+            <a:srgbClr val="213E4B"/>
+          </a:solidFill>
+          <a:ln w="20320">
+            <a:solidFill>
+              <a:srgbClr val="8EDBD4"/>
+            </a:solidFill>
+          </a:ln>
+          <a:effectLst/>
+        </p:spPr>
+        <p:txBody>
+          <a:bodyPr rtlCol="0" anchor="ctr"/>
+          <a:lstStyle/>
+          <a:p>
+            <a:pPr algn="ctr"/>
+          </a:p>
+        </p:txBody>
+      </p:sp>
+      <p:sp>
+        <p:nvSpPr>
+          <p:cNvPr id="59" name="A-E15 text 57" descr="sci-ppt:o057"/>
+          <p:cNvSpPr txBox="1"/>
+          <p:nvPr/>
+        </p:nvSpPr>
+        <p:spPr>
+          <a:xfrm>
+            <a:off x="8796528" y="1426464"/>
+            <a:ext cx="2935224" cy="247142"/>
+          </a:xfrm>
+          <a:prstGeom prst="rect">
+            <a:avLst/>
+          </a:prstGeom>
+          <a:noFill/>
+          <a:effectLst/>
+        </p:spPr>
+        <p:txBody>
+          <a:bodyPr wrap="none" lIns="18288" rIns="18288" tIns="18288" bIns="18288" anchor="t">
+            <a:spAutoFit/>
+          </a:bodyPr>
+          <a:lstStyle/>
+          <a:p>
+            <a:pPr algn="l">
+              <a:spcAft>
+                <a:spcPts val="0"/>
+              </a:spcAft>
+            </a:pPr>
+            <a:r>
+              <a:rPr sz="1300" b="1" i="0">
+                <a:solidFill>
+                  <a:srgbClr val="8EDBD4"/>
+                </a:solidFill>
+                <a:latin typeface="Arial"/>
+              </a:rPr>
+              <a:t>Sign and loss</a:t>
+            </a:r>
+          </a:p>
+        </p:txBody>
+      </p:sp>
+      <p:sp>
+        <p:nvSpPr>
+          <p:cNvPr id="60" name="A-E15 text 58" descr="sci-ppt:o058"/>
+          <p:cNvSpPr txBox="1"/>
+          <p:nvPr/>
+        </p:nvSpPr>
+        <p:spPr>
+          <a:xfrm>
+            <a:off x="8778240" y="1828800"/>
+            <a:ext cx="2971800" cy="223900"/>
+          </a:xfrm>
+          <a:prstGeom prst="rect">
+            <a:avLst/>
+          </a:prstGeom>
+          <a:noFill/>
+          <a:effectLst/>
+        </p:spPr>
+        <p:txBody>
+          <a:bodyPr wrap="none" lIns="18288" rIns="18288" tIns="18288" bIns="18288" anchor="t">
+            <a:spAutoFit/>
+          </a:bodyPr>
+          <a:lstStyle/>
+          <a:p>
+            <a:pPr algn="l">
+              <a:spcAft>
+                <a:spcPts val="0"/>
+              </a:spcAft>
+            </a:pPr>
+            <a:r>
+              <a:rPr sz="1150" b="1" i="0">
                 <a:solidFill>
                   <a:srgbClr val="E7F0F3"/>
                 </a:solidFill>
                 <a:latin typeface="Arial"/>
               </a:rPr>
-              <a:t>r</a:t>
-            </a:r>
-          </a:p>
-        </p:txBody>
-      </p:sp>
-      <p:cxnSp>
-        <p:nvCxnSpPr>
-          <p:cNvPr id="15" name="arrow 13" descr="sci-ppt:obj-013"/>
-          <p:cNvCxnSpPr/>
-          <p:nvPr/>
-        </p:nvCxnSpPr>
-        <p:spPr>
-          <a:xfrm>
-            <a:off x="2697480" y="1645920"/>
-            <a:ext cx="1691640" cy="0"/>
-          </a:xfrm>
-          <a:prstGeom prst="line">
-            <a:avLst/>
-          </a:prstGeom>
-          <a:ln w="21590">
-            <a:solidFill>
-              <a:srgbClr val="8EDBD4"/>
-            </a:solidFill>
-            <a:headEnd type="none" w="med" len="med"/>
-            <a:tailEnd type="triangle" w="med" len="med"/>
-          </a:ln>
-          <a:effectLst/>
-        </p:spPr>
-      </p:cxnSp>
-      <p:sp>
-        <p:nvSpPr>
-          <p:cNvPr id="16" name="text 14" descr="sci-ppt:obj-014"/>
+              <a:t>−4η_gṘ/R = +13 333.3 Pa</a:t>
+            </a:r>
+          </a:p>
+        </p:txBody>
+      </p:sp>
+      <p:sp>
+        <p:nvSpPr>
+          <p:cNvPr id="61" name="A-E15 text 59" descr="sci-ppt:o059"/>
           <p:cNvSpPr txBox="1"/>
           <p:nvPr/>
         </p:nvSpPr>
         <p:spPr>
           <a:xfrm>
-            <a:off x="2834640" y="1143000"/>
-            <a:ext cx="2286000" cy="310896"/>
+            <a:off x="8778240" y="2331720"/>
+            <a:ext cx="2971800" cy="216153"/>
           </a:xfrm>
           <a:prstGeom prst="rect">
             <a:avLst/>
@@ -3558,7 +6064,7 @@
           <a:effectLst/>
         </p:spPr>
         <p:txBody>
-          <a:bodyPr wrap="none" lIns="0" rIns="0" tIns="0" bIns="0" anchor="ctr">
+          <a:bodyPr wrap="none" lIns="18288" rIns="18288" tIns="18288" bIns="18288" anchor="t">
             <a:spAutoFit/>
           </a:bodyPr>
           <a:lstStyle/>
@@ -3569,27 +6075,27 @@
               </a:spcAft>
             </a:pPr>
             <a:r>
-              <a:rPr sz="1296" b="0" i="0">
+              <a:rPr sz="1100" b="1" i="0">
                 <a:solidFill>
                   <a:srgbClr val="E7F0F3"/>
                 </a:solidFill>
                 <a:latin typeface="Arial"/>
               </a:rPr>
-              <a:t>Material map</a:t>
-            </a:r>
-          </a:p>
-        </p:txBody>
-      </p:sp>
-      <p:sp>
-        <p:nvSpPr>
-          <p:cNvPr id="17" name="text 15" descr="sci-ppt:obj-015"/>
+              <a:t>P_dis = 16πη_gRṘ² = 1.50796447×10⁻³ W</a:t>
+            </a:r>
+          </a:p>
+        </p:txBody>
+      </p:sp>
+      <p:sp>
+        <p:nvSpPr>
+          <p:cNvPr id="62" name="A-E15 text 60" descr="sci-ppt:o060"/>
           <p:cNvSpPr txBox="1"/>
           <p:nvPr/>
         </p:nvSpPr>
         <p:spPr>
           <a:xfrm>
-            <a:off x="1005840" y="2578608"/>
-            <a:ext cx="2286000" cy="310896"/>
+            <a:off x="8778240" y="3063240"/>
+            <a:ext cx="2971800" cy="402081"/>
           </a:xfrm>
           <a:prstGeom prst="rect">
             <a:avLst/>
@@ -3598,7 +6104,7 @@
           <a:effectLst/>
         </p:spPr>
         <p:txBody>
-          <a:bodyPr wrap="none" lIns="0" rIns="0" tIns="0" bIns="0" anchor="ctr">
+          <a:bodyPr wrap="none" lIns="18288" rIns="18288" tIns="18288" bIns="18288" anchor="t">
             <a:spAutoFit/>
           </a:bodyPr>
           <a:lstStyle/>
@@ -3609,27 +6115,83 @@
               </a:spcAft>
             </a:pPr>
             <a:r>
-              <a:rPr sz="1296" b="0" i="0">
+              <a:rPr sz="1150" b="0" i="0">
+                <a:solidFill>
+                  <a:srgbClr val="B4C7D2"/>
+                </a:solidFill>
+                <a:latin typeface="Arial"/>
+              </a:rPr>
+              <a:t>Inward motion flips the pressure term;</a:t>
+            </a:r>
+          </a:p>
+          <a:p>
+            <a:pPr algn="l">
+              <a:spcAft>
+                <a:spcPts val="0"/>
+              </a:spcAft>
+            </a:pPr>
+            <a:r>
+              <a:rPr sz="1150" b="0" i="0">
+                <a:solidFill>
+                  <a:srgbClr val="B4C7D2"/>
+                </a:solidFill>
+                <a:latin typeface="Arial"/>
+              </a:rPr>
+              <a:t>dissipated power stays positive.</a:t>
+            </a:r>
+          </a:p>
+        </p:txBody>
+      </p:sp>
+      <p:sp>
+        <p:nvSpPr>
+          <p:cNvPr id="63" name="A-E15 text 61" descr="sci-ppt:o061"/>
+          <p:cNvSpPr txBox="1"/>
+          <p:nvPr/>
+        </p:nvSpPr>
+        <p:spPr>
+          <a:xfrm>
+            <a:off x="914400" y="5486400"/>
+            <a:ext cx="10972800" cy="239395"/>
+          </a:xfrm>
+          <a:prstGeom prst="rect">
+            <a:avLst/>
+          </a:prstGeom>
+          <a:noFill/>
+          <a:effectLst/>
+        </p:spPr>
+        <p:txBody>
+          <a:bodyPr wrap="none" lIns="18288" rIns="18288" tIns="18288" bIns="18288" anchor="t">
+            <a:spAutoFit/>
+          </a:bodyPr>
+          <a:lstStyle/>
+          <a:p>
+            <a:pPr algn="l">
+              <a:spcAft>
+                <a:spcPts val="0"/>
+              </a:spcAft>
+            </a:pPr>
+            <a:r>
+              <a:rPr sz="1250" b="0" i="0">
                 <a:solidFill>
                   <a:srgbClr val="E7F0F3"/>
                 </a:solidFill>
                 <a:latin typeface="Arial"/>
               </a:rPr>
-              <a:t>Reference</a:t>
-            </a:r>
-          </a:p>
-        </p:txBody>
-      </p:sp>
-      <p:sp>
-        <p:nvSpPr>
-          <p:cNvPr id="18" name="text 16" descr="sci-ppt:obj-016"/>
+              <a:t>η_g = 0.010 Pa s, R = 30 µm, Ṙ = −10 m/s. The viscous term is linear in Ṙ, the dissipation is quadratic.</a:t>
+            </a:r>
+          </a:p>
+        </p:txBody>
+      </p:sp>
+      <p:sp>
+        <p:nvSpPr>
+          <p:cNvPr id="64" name="A-E15 text 62" descr="sci-ppt:o062"/>
           <p:cNvSpPr txBox="1"/>
           <p:nvPr/>
         </p:nvSpPr>
         <p:spPr>
           <a:xfrm>
-            <a:off x="4846320" y="2660904"/>
-            <a:ext cx="3383280" cy="310896"/>
+            <a:off x="320040" y="6510528"/>
+            <a:ext cx="11521440" cy="200660"/>
           </a:xfrm>
           <a:prstGeom prst="rect">
             <a:avLst/>
@@ -3638,7 +6200,7 @@
           <a:effectLst/>
         </p:spPr>
         <p:txBody>
-          <a:bodyPr wrap="none" lIns="0" rIns="0" tIns="0" bIns="0" anchor="ctr">
+          <a:bodyPr wrap="none" lIns="18288" rIns="18288" tIns="18288" bIns="18288" anchor="t">
             <a:spAutoFit/>
           </a:bodyPr>
           <a:lstStyle/>
@@ -3649,533 +6211,13 @@
               </a:spcAft>
             </a:pPr>
             <a:r>
-              <a:rPr sz="1296" b="0" i="0">
+              <a:rPr sz="1000" b="0" i="0">
                 <a:solidFill>
-                  <a:srgbClr val="E7F0F3"/>
+                  <a:srgbClr val="B4C7D2"/>
                 </a:solidFill>
                 <a:latin typeface="Arial"/>
               </a:rPr>
-              <a:t>Deformed: λr , λθ</a:t>
-            </a:r>
-          </a:p>
-        </p:txBody>
-      </p:sp>
-      <p:sp>
-        <p:nvSpPr>
-          <p:cNvPr id="19" name="text 17" descr="sci-ppt:obj-017"/>
-          <p:cNvSpPr txBox="1"/>
-          <p:nvPr/>
-        </p:nvSpPr>
-        <p:spPr>
-          <a:xfrm>
-            <a:off x="6839712" y="777240"/>
-            <a:ext cx="1645920" cy="310896"/>
-          </a:xfrm>
-          <a:prstGeom prst="rect">
-            <a:avLst/>
-          </a:prstGeom>
-          <a:noFill/>
-          <a:effectLst/>
-        </p:spPr>
-        <p:txBody>
-          <a:bodyPr wrap="none" lIns="0" rIns="0" tIns="0" bIns="0" anchor="ctr">
-            <a:spAutoFit/>
-          </a:bodyPr>
-          <a:lstStyle/>
-          <a:p>
-            <a:pPr algn="l">
-              <a:spcAft>
-                <a:spcPts val="0"/>
-              </a:spcAft>
-            </a:pPr>
-            <a:r>
-              <a:rPr sz="1296" b="0" i="0">
-                <a:solidFill>
-                  <a:srgbClr val="E7F0F3"/>
-                </a:solidFill>
-                <a:latin typeface="Arial"/>
-              </a:rPr>
-              <a:t>Gg , ηg</a:t>
-            </a:r>
-          </a:p>
-        </p:txBody>
-      </p:sp>
-      <p:sp>
-        <p:nvSpPr>
-          <p:cNvPr id="20" name="text 18" descr="sci-ppt:obj-018"/>
-          <p:cNvSpPr txBox="1"/>
-          <p:nvPr/>
-        </p:nvSpPr>
-        <p:spPr>
-          <a:xfrm>
-            <a:off x="6839712" y="1207008"/>
-            <a:ext cx="1828800" cy="310896"/>
-          </a:xfrm>
-          <a:prstGeom prst="rect">
-            <a:avLst/>
-          </a:prstGeom>
-          <a:noFill/>
-          <a:effectLst/>
-        </p:spPr>
-        <p:txBody>
-          <a:bodyPr wrap="none" lIns="0" rIns="0" tIns="0" bIns="0" anchor="ctr">
-            <a:spAutoFit/>
-          </a:bodyPr>
-          <a:lstStyle/>
-          <a:p>
-            <a:pPr algn="l">
-              <a:spcAft>
-                <a:spcPts val="0"/>
-              </a:spcAft>
-            </a:pPr>
-            <a:r>
-              <a:rPr sz="1296" b="0" i="0">
-                <a:solidFill>
-                  <a:srgbClr val="E7F0F3"/>
-                </a:solidFill>
-                <a:latin typeface="Arial"/>
-              </a:rPr>
-              <a:t>σrr , σθθ</a:t>
-            </a:r>
-          </a:p>
-        </p:txBody>
-      </p:sp>
-      <p:sp>
-        <p:nvSpPr>
-          <p:cNvPr id="21" name="text 19" descr="sci-ppt:obj-019"/>
-          <p:cNvSpPr txBox="1"/>
-          <p:nvPr/>
-        </p:nvSpPr>
-        <p:spPr>
-          <a:xfrm>
-            <a:off x="6839712" y="1645920"/>
-            <a:ext cx="1371600" cy="310896"/>
-          </a:xfrm>
-          <a:prstGeom prst="rect">
-            <a:avLst/>
-          </a:prstGeom>
-          <a:noFill/>
-          <a:effectLst/>
-        </p:spPr>
-        <p:txBody>
-          <a:bodyPr wrap="none" lIns="0" rIns="0" tIns="0" bIns="0" anchor="ctr">
-            <a:spAutoFit/>
-          </a:bodyPr>
-          <a:lstStyle/>
-          <a:p>
-            <a:pPr algn="l">
-              <a:spcAft>
-                <a:spcPts val="0"/>
-              </a:spcAft>
-            </a:pPr>
-            <a:r>
-              <a:rPr sz="1296" b="0" i="0">
-                <a:solidFill>
-                  <a:srgbClr val="E7F0F3"/>
-                </a:solidFill>
-                <a:latin typeface="Arial"/>
-              </a:rPr>
-              <a:t>p∞</a:t>
-            </a:r>
-          </a:p>
-        </p:txBody>
-      </p:sp>
-      <p:sp>
-        <p:nvSpPr>
-          <p:cNvPr id="22" name="text 20" descr="sci-ppt:obj-020"/>
-          <p:cNvSpPr txBox="1"/>
-          <p:nvPr/>
-        </p:nvSpPr>
-        <p:spPr>
-          <a:xfrm>
-            <a:off x="5266944" y="1682496"/>
-            <a:ext cx="822960" cy="310896"/>
-          </a:xfrm>
-          <a:prstGeom prst="rect">
-            <a:avLst/>
-          </a:prstGeom>
-          <a:noFill/>
-          <a:effectLst/>
-        </p:spPr>
-        <p:txBody>
-          <a:bodyPr wrap="none" lIns="0" rIns="0" tIns="0" bIns="0" anchor="ctr">
-            <a:spAutoFit/>
-          </a:bodyPr>
-          <a:lstStyle/>
-          <a:p>
-            <a:pPr algn="l">
-              <a:spcAft>
-                <a:spcPts val="0"/>
-              </a:spcAft>
-            </a:pPr>
-            <a:r>
-              <a:rPr sz="1296" b="0" i="0">
-                <a:solidFill>
-                  <a:srgbClr val="E7F0F3"/>
-                </a:solidFill>
-                <a:latin typeface="Arial"/>
-              </a:rPr>
-              <a:t>pb</a:t>
-            </a:r>
-          </a:p>
-        </p:txBody>
-      </p:sp>
-      <p:sp>
-        <p:nvSpPr>
-          <p:cNvPr id="23" name="text 21" descr="sci-ppt:obj-021"/>
-          <p:cNvSpPr txBox="1"/>
-          <p:nvPr/>
-        </p:nvSpPr>
-        <p:spPr>
-          <a:xfrm>
-            <a:off x="868680" y="2990088"/>
-            <a:ext cx="7772400" cy="310896"/>
-          </a:xfrm>
-          <a:prstGeom prst="rect">
-            <a:avLst/>
-          </a:prstGeom>
-          <a:noFill/>
-          <a:effectLst/>
-        </p:spPr>
-        <p:txBody>
-          <a:bodyPr wrap="none" lIns="0" rIns="0" tIns="0" bIns="0" anchor="ctr">
-            <a:spAutoFit/>
-          </a:bodyPr>
-          <a:lstStyle/>
-          <a:p>
-            <a:pPr algn="l">
-              <a:spcAft>
-                <a:spcPts val="0"/>
-              </a:spcAft>
-            </a:pPr>
-            <a:r>
-              <a:rPr sz="1152" b="0" i="0">
-                <a:solidFill>
-                  <a:srgbClr val="E7F0F3"/>
-                </a:solidFill>
-                <a:latin typeface="Arial"/>
-              </a:rPr>
-              <a:t>r₀³ − Rref³ = r³ − R³ ; radial coordinates point outward</a:t>
-            </a:r>
-          </a:p>
-        </p:txBody>
-      </p:sp>
-      <p:sp>
-        <p:nvSpPr>
-          <p:cNvPr id="24" name="text 22" descr="sci-ppt:obj-022"/>
-          <p:cNvSpPr txBox="1"/>
-          <p:nvPr/>
-        </p:nvSpPr>
-        <p:spPr>
-          <a:xfrm>
-            <a:off x="256032" y="3465576"/>
-            <a:ext cx="7315200" cy="310896"/>
-          </a:xfrm>
-          <a:prstGeom prst="rect">
-            <a:avLst/>
-          </a:prstGeom>
-          <a:noFill/>
-          <a:effectLst/>
-        </p:spPr>
-        <p:txBody>
-          <a:bodyPr wrap="none" lIns="0" rIns="0" tIns="0" bIns="0" anchor="ctr">
-            <a:spAutoFit/>
-          </a:bodyPr>
-          <a:lstStyle/>
-          <a:p>
-            <a:pPr algn="l">
-              <a:spcAft>
-                <a:spcPts val="0"/>
-              </a:spcAft>
-            </a:pPr>
-            <a:r>
-              <a:rPr sz="1296" b="0" i="0">
-                <a:solidFill>
-                  <a:srgbClr val="8EDBD4"/>
-                </a:solidFill>
-                <a:latin typeface="Arial"/>
-              </a:rPr>
-              <a:t>Variables and physical limits</a:t>
-            </a:r>
-          </a:p>
-        </p:txBody>
-      </p:sp>
-      <p:sp>
-        <p:nvSpPr>
-          <p:cNvPr id="25" name="text 23" descr="sci-ppt:obj-023"/>
-          <p:cNvSpPr txBox="1"/>
-          <p:nvPr/>
-        </p:nvSpPr>
-        <p:spPr>
-          <a:xfrm>
-            <a:off x="365760" y="3813048"/>
-            <a:ext cx="8412480" cy="310896"/>
-          </a:xfrm>
-          <a:prstGeom prst="rect">
-            <a:avLst/>
-          </a:prstGeom>
-          <a:noFill/>
-          <a:effectLst/>
-        </p:spPr>
-        <p:txBody>
-          <a:bodyPr wrap="none" lIns="0" rIns="0" tIns="0" bIns="0" anchor="ctr">
-            <a:spAutoFit/>
-          </a:bodyPr>
-          <a:lstStyle/>
-          <a:p>
-            <a:pPr algn="l">
-              <a:spcAft>
-                <a:spcPts val="0"/>
-              </a:spcAft>
-            </a:pPr>
-            <a:r>
-              <a:rPr sz="1152" b="0" i="0">
-                <a:solidFill>
-                  <a:srgbClr val="E7F0F3"/>
-                </a:solidFill>
-                <a:latin typeface="Arial"/>
-              </a:rPr>
-              <a:t>• Ṙ = −10 m/s: inward</a:t>
-            </a:r>
-          </a:p>
-        </p:txBody>
-      </p:sp>
-      <p:sp>
-        <p:nvSpPr>
-          <p:cNvPr id="26" name="text 24" descr="sci-ppt:obj-024"/>
-          <p:cNvSpPr txBox="1"/>
-          <p:nvPr/>
-        </p:nvSpPr>
-        <p:spPr>
-          <a:xfrm>
-            <a:off x="365760" y="4023360"/>
-            <a:ext cx="8412480" cy="310896"/>
-          </a:xfrm>
-          <a:prstGeom prst="rect">
-            <a:avLst/>
-          </a:prstGeom>
-          <a:noFill/>
-          <a:effectLst/>
-        </p:spPr>
-        <p:txBody>
-          <a:bodyPr wrap="none" lIns="0" rIns="0" tIns="0" bIns="0" anchor="ctr">
-            <a:spAutoFit/>
-          </a:bodyPr>
-          <a:lstStyle/>
-          <a:p>
-            <a:pPr algn="l">
-              <a:spcAft>
-                <a:spcPts val="0"/>
-              </a:spcAft>
-            </a:pPr>
-            <a:r>
-              <a:rPr sz="1152" b="0" i="0">
-                <a:solidFill>
-                  <a:srgbClr val="E7F0F3"/>
-                </a:solidFill>
-                <a:latin typeface="Arial"/>
-              </a:rPr>
-              <a:t>• R = 30 µm</a:t>
-            </a:r>
-          </a:p>
-        </p:txBody>
-      </p:sp>
-      <p:sp>
-        <p:nvSpPr>
-          <p:cNvPr id="27" name="text 25" descr="sci-ppt:obj-025"/>
-          <p:cNvSpPr txBox="1"/>
-          <p:nvPr/>
-        </p:nvSpPr>
-        <p:spPr>
-          <a:xfrm>
-            <a:off x="365760" y="4233672"/>
-            <a:ext cx="8412480" cy="310896"/>
-          </a:xfrm>
-          <a:prstGeom prst="rect">
-            <a:avLst/>
-          </a:prstGeom>
-          <a:noFill/>
-          <a:effectLst/>
-        </p:spPr>
-        <p:txBody>
-          <a:bodyPr wrap="none" lIns="0" rIns="0" tIns="0" bIns="0" anchor="ctr">
-            <a:spAutoFit/>
-          </a:bodyPr>
-          <a:lstStyle/>
-          <a:p>
-            <a:pPr algn="l">
-              <a:spcAft>
-                <a:spcPts val="0"/>
-              </a:spcAft>
-            </a:pPr>
-            <a:r>
-              <a:rPr sz="1152" b="0" i="0">
-                <a:solidFill>
-                  <a:srgbClr val="E7F0F3"/>
-                </a:solidFill>
-                <a:latin typeface="Arial"/>
-              </a:rPr>
-              <a:t>• ηg = 0.010 Pa s</a:t>
-            </a:r>
-          </a:p>
-        </p:txBody>
-      </p:sp>
-      <p:sp>
-        <p:nvSpPr>
-          <p:cNvPr id="28" name="text 26" descr="sci-ppt:obj-026"/>
-          <p:cNvSpPr txBox="1"/>
-          <p:nvPr/>
-        </p:nvSpPr>
-        <p:spPr>
-          <a:xfrm>
-            <a:off x="365760" y="4443984"/>
-            <a:ext cx="8412480" cy="310896"/>
-          </a:xfrm>
-          <a:prstGeom prst="rect">
-            <a:avLst/>
-          </a:prstGeom>
-          <a:noFill/>
-          <a:effectLst/>
-        </p:spPr>
-        <p:txBody>
-          <a:bodyPr wrap="none" lIns="0" rIns="0" tIns="0" bIns="0" anchor="ctr">
-            <a:spAutoFit/>
-          </a:bodyPr>
-          <a:lstStyle/>
-          <a:p>
-            <a:pPr algn="l">
-              <a:spcAft>
-                <a:spcPts val="0"/>
-              </a:spcAft>
-            </a:pPr>
-            <a:r>
-              <a:rPr sz="1152" b="0" i="0">
-                <a:solidFill>
-                  <a:srgbClr val="E7F0F3"/>
-                </a:solidFill>
-                <a:latin typeface="Arial"/>
-              </a:rPr>
-              <a:t>• pvisc,RHS = +13.3333 kPa</a:t>
-            </a:r>
-          </a:p>
-        </p:txBody>
-      </p:sp>
-      <p:sp>
-        <p:nvSpPr>
-          <p:cNvPr id="29" name="text 27" descr="sci-ppt:obj-027"/>
-          <p:cNvSpPr txBox="1"/>
-          <p:nvPr/>
-        </p:nvSpPr>
-        <p:spPr>
-          <a:xfrm>
-            <a:off x="365760" y="4654296"/>
-            <a:ext cx="8412480" cy="310896"/>
-          </a:xfrm>
-          <a:prstGeom prst="rect">
-            <a:avLst/>
-          </a:prstGeom>
-          <a:noFill/>
-          <a:effectLst/>
-        </p:spPr>
-        <p:txBody>
-          <a:bodyPr wrap="none" lIns="0" rIns="0" tIns="0" bIns="0" anchor="ctr">
-            <a:spAutoFit/>
-          </a:bodyPr>
-          <a:lstStyle/>
-          <a:p>
-            <a:pPr algn="l">
-              <a:spcAft>
-                <a:spcPts val="0"/>
-              </a:spcAft>
-            </a:pPr>
-            <a:r>
-              <a:rPr sz="1152" b="0" i="0">
-                <a:solidFill>
-                  <a:srgbClr val="E7F0F3"/>
-                </a:solidFill>
-                <a:latin typeface="Arial"/>
-              </a:rPr>
-              <a:t>• Pdis = +1.50796 mW</a:t>
-            </a:r>
-          </a:p>
-        </p:txBody>
-      </p:sp>
-      <p:sp>
-        <p:nvSpPr>
-          <p:cNvPr id="30" name="text 28" descr="sci-ppt:obj-028"/>
-          <p:cNvSpPr txBox="1"/>
-          <p:nvPr/>
-        </p:nvSpPr>
-        <p:spPr>
-          <a:xfrm>
-            <a:off x="365760" y="4864608"/>
-            <a:ext cx="8412480" cy="310896"/>
-          </a:xfrm>
-          <a:prstGeom prst="rect">
-            <a:avLst/>
-          </a:prstGeom>
-          <a:noFill/>
-          <a:effectLst/>
-        </p:spPr>
-        <p:txBody>
-          <a:bodyPr wrap="none" lIns="0" rIns="0" tIns="0" bIns="0" anchor="ctr">
-            <a:spAutoFit/>
-          </a:bodyPr>
-          <a:lstStyle/>
-          <a:p>
-            <a:pPr algn="l">
-              <a:spcAft>
-                <a:spcPts val="0"/>
-              </a:spcAft>
-            </a:pPr>
-            <a:r>
-              <a:rPr sz="1152" b="0" i="0">
-                <a:solidFill>
-                  <a:srgbClr val="E7F0F3"/>
-                </a:solidFill>
-                <a:latin typeface="Arial"/>
-              </a:rPr>
-              <a:t>Viscosity opposes collapse</a:t>
-            </a:r>
-          </a:p>
-        </p:txBody>
-      </p:sp>
-      <p:sp>
-        <p:nvSpPr>
-          <p:cNvPr id="31" name="text 29" descr="sci-ppt:obj-029"/>
-          <p:cNvSpPr txBox="1"/>
-          <p:nvPr/>
-        </p:nvSpPr>
-        <p:spPr>
-          <a:xfrm>
-            <a:off x="365760" y="5074920"/>
-            <a:ext cx="8412480" cy="310896"/>
-          </a:xfrm>
-          <a:prstGeom prst="rect">
-            <a:avLst/>
-          </a:prstGeom>
-          <a:noFill/>
-          <a:effectLst/>
-        </p:spPr>
-        <p:txBody>
-          <a:bodyPr wrap="none" lIns="0" rIns="0" tIns="0" bIns="0" anchor="ctr">
-            <a:spAutoFit/>
-          </a:bodyPr>
-          <a:lstStyle/>
-          <a:p>
-            <a:pPr algn="l">
-              <a:spcAft>
-                <a:spcPts val="0"/>
-              </a:spcAft>
-            </a:pPr>
-            <a:r>
-              <a:rPr sz="1152" b="0" i="0">
-                <a:solidFill>
-                  <a:srgbClr val="E7F0F3"/>
-                </a:solidFill>
-                <a:latin typeface="Arial"/>
-              </a:rPr>
-              <a:t>Dissipation is positive for either speed sign</a:t>
+              <a:t>Signed-pressure and positive-loss check of Eq. A-E15.</a:t>
             </a:r>
           </a:p>
         </p:txBody>
